--- a/urok18/Урок18_презентация.pptx
+++ b/urok18/Урок18_презентация.pptx
@@ -10,9 +10,11 @@
     <p:sldId id="258" r:id="rId4"/>
     <p:sldId id="259" r:id="rId5"/>
     <p:sldId id="260" r:id="rId6"/>
+    <p:sldId id="261" r:id="rId7"/>
+    <p:sldId id="262" r:id="rId8"/>
   </p:sldIdLst>
   <p:notesMasterIdLst>
-    <p:notesMasterId r:id="rId7"/>
+    <p:notesMasterId r:id="rId9"/>
   </p:notesMasterIdLst>
   <p:sldSz cx="12191695" cy="6858000"/>
   <p:notesSz cx="6858000" cy="12191695"/>
@@ -882,6 +884,182 @@
             <a:fld id="{F7021451-1387-4CA6-816F-3879F97B5CBC}" type="slidenum">
               <a:rPr lang="en-US"/>
               <a:t>5</a:t>
+            </a:fld>
+            <a:endParaRPr lang="en-US"/>
+          </a:p>
+        </p:txBody>
+      </p:sp>
+    </p:spTree>
+    <p:extLst>
+      <p:ext uri="{BB962C8B-B14F-4D97-AF65-F5344CB8AC3E}">
+        <p14:creationId xmlns:p14="http://schemas.microsoft.com/office/powerpoint/2010/main" val="1024086991"/>
+      </p:ext>
+    </p:extLst>
+  </p:cSld>
+  <p:clrMapOvr>
+    <a:masterClrMapping/>
+  </p:clrMapOvr>
+</p:notes>
+</file>
+
+<file path=ppt/notesSlides/notesSlide6.xml><?xml version="1.0" encoding="utf-8"?>
+<p:notes xmlns:a="http://schemas.openxmlformats.org/drawingml/2006/main" xmlns:r="http://schemas.openxmlformats.org/officeDocument/2006/relationships" xmlns:p="http://schemas.openxmlformats.org/presentationml/2006/main">
+  <p:cSld>
+    <p:spTree>
+      <p:nvGrpSpPr>
+        <p:cNvPr id="1" name=""/>
+        <p:cNvGrpSpPr/>
+        <p:nvPr/>
+      </p:nvGrpSpPr>
+      <p:grpSpPr>
+        <a:xfrm>
+          <a:off x="0" y="0"/>
+          <a:ext cx="0" cy="0"/>
+          <a:chOff x="0" y="0"/>
+          <a:chExt cx="0" cy="0"/>
+        </a:xfrm>
+      </p:grpSpPr>
+      <p:sp>
+        <p:nvSpPr>
+          <p:cNvPr id="2" name="Slide Image Placeholder 1"/>
+          <p:cNvSpPr>
+            <a:spLocks noGrp="1" noRot="1" noChangeAspect="1"/>
+          </p:cNvSpPr>
+          <p:nvPr>
+            <p:ph type="sldImg"/>
+          </p:nvPr>
+        </p:nvSpPr>
+        <p:spPr/>
+      </p:sp>
+      <p:sp>
+        <p:nvSpPr>
+          <p:cNvPr id="3" name="Notes Placeholder 2"/>
+          <p:cNvSpPr>
+            <a:spLocks noGrp="1"/>
+          </p:cNvSpPr>
+          <p:nvPr>
+            <p:ph type="body" idx="1"/>
+          </p:nvPr>
+        </p:nvSpPr>
+        <p:spPr/>
+        <p:txBody>
+          <a:bodyPr/>
+          <a:lstStyle/>
+          <a:p>
+            <a:r>
+              <a:rPr lang="en-US" dirty="0"/>
+              <a:t/>
+            </a:r>
+            <a:endParaRPr lang="en-US" dirty="0"/>
+          </a:p>
+        </p:txBody>
+      </p:sp>
+      <p:sp>
+        <p:nvSpPr>
+          <p:cNvPr id="4" name="Slide Number Placeholder 3"/>
+          <p:cNvSpPr>
+            <a:spLocks noGrp="1"/>
+          </p:cNvSpPr>
+          <p:nvPr>
+            <p:ph type="sldNum" sz="quarter" idx="10"/>
+          </p:nvPr>
+        </p:nvSpPr>
+        <p:spPr/>
+        <p:txBody>
+          <a:bodyPr/>
+          <a:lstStyle/>
+          <a:p>
+            <a:fld id="{F7021451-1387-4CA6-816F-3879F97B5CBC}" type="slidenum">
+              <a:rPr lang="en-US"/>
+              <a:t>6</a:t>
+            </a:fld>
+            <a:endParaRPr lang="en-US"/>
+          </a:p>
+        </p:txBody>
+      </p:sp>
+    </p:spTree>
+    <p:extLst>
+      <p:ext uri="{BB962C8B-B14F-4D97-AF65-F5344CB8AC3E}">
+        <p14:creationId xmlns:p14="http://schemas.microsoft.com/office/powerpoint/2010/main" val="1024086991"/>
+      </p:ext>
+    </p:extLst>
+  </p:cSld>
+  <p:clrMapOvr>
+    <a:masterClrMapping/>
+  </p:clrMapOvr>
+</p:notes>
+</file>
+
+<file path=ppt/notesSlides/notesSlide7.xml><?xml version="1.0" encoding="utf-8"?>
+<p:notes xmlns:a="http://schemas.openxmlformats.org/drawingml/2006/main" xmlns:r="http://schemas.openxmlformats.org/officeDocument/2006/relationships" xmlns:p="http://schemas.openxmlformats.org/presentationml/2006/main">
+  <p:cSld>
+    <p:spTree>
+      <p:nvGrpSpPr>
+        <p:cNvPr id="1" name=""/>
+        <p:cNvGrpSpPr/>
+        <p:nvPr/>
+      </p:nvGrpSpPr>
+      <p:grpSpPr>
+        <a:xfrm>
+          <a:off x="0" y="0"/>
+          <a:ext cx="0" cy="0"/>
+          <a:chOff x="0" y="0"/>
+          <a:chExt cx="0" cy="0"/>
+        </a:xfrm>
+      </p:grpSpPr>
+      <p:sp>
+        <p:nvSpPr>
+          <p:cNvPr id="2" name="Slide Image Placeholder 1"/>
+          <p:cNvSpPr>
+            <a:spLocks noGrp="1" noRot="1" noChangeAspect="1"/>
+          </p:cNvSpPr>
+          <p:nvPr>
+            <p:ph type="sldImg"/>
+          </p:nvPr>
+        </p:nvSpPr>
+        <p:spPr/>
+      </p:sp>
+      <p:sp>
+        <p:nvSpPr>
+          <p:cNvPr id="3" name="Notes Placeholder 2"/>
+          <p:cNvSpPr>
+            <a:spLocks noGrp="1"/>
+          </p:cNvSpPr>
+          <p:nvPr>
+            <p:ph type="body" idx="1"/>
+          </p:nvPr>
+        </p:nvSpPr>
+        <p:spPr/>
+        <p:txBody>
+          <a:bodyPr/>
+          <a:lstStyle/>
+          <a:p>
+            <a:r>
+              <a:rPr lang="en-US" dirty="0"/>
+              <a:t/>
+            </a:r>
+            <a:endParaRPr lang="en-US" dirty="0"/>
+          </a:p>
+        </p:txBody>
+      </p:sp>
+      <p:sp>
+        <p:nvSpPr>
+          <p:cNvPr id="4" name="Slide Number Placeholder 3"/>
+          <p:cNvSpPr>
+            <a:spLocks noGrp="1"/>
+          </p:cNvSpPr>
+          <p:nvPr>
+            <p:ph type="sldNum" sz="quarter" idx="10"/>
+          </p:nvPr>
+        </p:nvSpPr>
+        <p:spPr/>
+        <p:txBody>
+          <a:bodyPr/>
+          <a:lstStyle/>
+          <a:p>
+            <a:fld id="{F7021451-1387-4CA6-816F-3879F97B5CBC}" type="slidenum">
+              <a:rPr lang="en-US"/>
+              <a:t>7</a:t>
             </a:fld>
             <a:endParaRPr lang="en-US"/>
           </a:p>
@@ -1233,18 +1411,174 @@
       </p:grpSpPr>
       <p:sp>
         <p:nvSpPr>
-          <p:cNvPr id="2" name="Shape 0"/>
-          <p:cNvSpPr/>
-          <p:nvPr/>
-        </p:nvSpPr>
-        <p:spPr>
-          <a:xfrm>
-            <a:off x="9144000" y="1554480"/>
-            <a:ext cx="2743200" cy="548640"/>
+          <p:cNvPr id="2" name="Text 0"/>
+          <p:cNvSpPr/>
+          <p:nvPr/>
+        </p:nvSpPr>
+        <p:spPr>
+          <a:xfrm>
+            <a:off x="594360" y="457200"/>
+            <a:ext cx="10972800" cy="320040"/>
+          </a:xfrm>
+          <a:prstGeom prst="rect">
+            <a:avLst/>
+          </a:prstGeom>
+          <a:noFill/>
+          <a:ln/>
+        </p:spPr>
+        <p:txBody>
+          <a:bodyPr wrap="square" rtlCol="0" anchor="ctr"/>
+          <a:lstStyle/>
+          <a:p>
+            <a:pPr indent="0" marL="0">
+              <a:buNone/>
+            </a:pPr>
+            <a:r>
+              <a:rPr lang="en-US" sz="1300" b="1" spc="200" kern="0" dirty="0">
+                <a:solidFill>
+                  <a:srgbClr val="27D3EE"/>
+                </a:solidFill>
+                <a:latin typeface="Calibri" pitchFamily="34" charset="0"/>
+                <a:ea typeface="Calibri" pitchFamily="34" charset="-122"/>
+                <a:cs typeface="Calibri" pitchFamily="34" charset="-120"/>
+              </a:rPr>
+              <a:t>ФАЗА 4 · НЕДЕЛЯ 9 · ПРАКТИКА + КОНКУРС</a:t>
+            </a:r>
+            <a:endParaRPr lang="en-US" sz="1300" dirty="0"/>
+          </a:p>
+        </p:txBody>
+      </p:sp>
+      <p:sp>
+        <p:nvSpPr>
+          <p:cNvPr id="3" name="Text 1"/>
+          <p:cNvSpPr/>
+          <p:nvPr/>
+        </p:nvSpPr>
+        <p:spPr>
+          <a:xfrm>
+            <a:off x="594360" y="1737360"/>
+            <a:ext cx="8229600" cy="1097280"/>
+          </a:xfrm>
+          <a:prstGeom prst="rect">
+            <a:avLst/>
+          </a:prstGeom>
+          <a:noFill/>
+          <a:ln/>
+        </p:spPr>
+        <p:txBody>
+          <a:bodyPr wrap="square" rtlCol="0" anchor="ctr"/>
+          <a:lstStyle/>
+          <a:p>
+            <a:pPr indent="0" marL="0">
+              <a:buNone/>
+            </a:pPr>
+            <a:r>
+              <a:rPr lang="en-US" sz="5200" b="1" dirty="0">
+                <a:solidFill>
+                  <a:srgbClr val="FFFFFF"/>
+                </a:solidFill>
+                <a:latin typeface="Calibri" pitchFamily="34" charset="0"/>
+                <a:ea typeface="Calibri" pitchFamily="34" charset="-122"/>
+                <a:cs typeface="Calibri" pitchFamily="34" charset="-120"/>
+              </a:rPr>
+              <a:t>LLM на практике</a:t>
+            </a:r>
+            <a:endParaRPr lang="en-US" sz="5200" dirty="0"/>
+          </a:p>
+        </p:txBody>
+      </p:sp>
+      <p:sp>
+        <p:nvSpPr>
+          <p:cNvPr id="4" name="Text 2"/>
+          <p:cNvSpPr/>
+          <p:nvPr/>
+        </p:nvSpPr>
+        <p:spPr>
+          <a:xfrm>
+            <a:off x="594360" y="3017520"/>
+            <a:ext cx="8229600" cy="548640"/>
+          </a:xfrm>
+          <a:prstGeom prst="rect">
+            <a:avLst/>
+          </a:prstGeom>
+          <a:noFill/>
+          <a:ln/>
+        </p:spPr>
+        <p:txBody>
+          <a:bodyPr wrap="square" rtlCol="0" anchor="ctr"/>
+          <a:lstStyle/>
+          <a:p>
+            <a:pPr indent="0" marL="0">
+              <a:buNone/>
+            </a:pPr>
+            <a:r>
+              <a:rPr lang="en-US" sz="2400" dirty="0">
+                <a:solidFill>
+                  <a:srgbClr val="D9D4F2"/>
+                </a:solidFill>
+                <a:latin typeface="Calibri" pitchFamily="34" charset="0"/>
+                <a:ea typeface="Calibri" pitchFamily="34" charset="-122"/>
+                <a:cs typeface="Calibri" pitchFamily="34" charset="-120"/>
+              </a:rPr>
+              <a:t>Промптинг · классификация · свой бот</a:t>
+            </a:r>
+            <a:endParaRPr lang="en-US" sz="2400" dirty="0"/>
+          </a:p>
+        </p:txBody>
+      </p:sp>
+      <p:sp>
+        <p:nvSpPr>
+          <p:cNvPr id="5" name="Text 3"/>
+          <p:cNvSpPr/>
+          <p:nvPr/>
+        </p:nvSpPr>
+        <p:spPr>
+          <a:xfrm>
+            <a:off x="594360" y="4114800"/>
+            <a:ext cx="8229600" cy="365760"/>
+          </a:xfrm>
+          <a:prstGeom prst="rect">
+            <a:avLst/>
+          </a:prstGeom>
+          <a:noFill/>
+          <a:ln/>
+        </p:spPr>
+        <p:txBody>
+          <a:bodyPr wrap="square" rtlCol="0" anchor="ctr"/>
+          <a:lstStyle/>
+          <a:p>
+            <a:pPr indent="0" marL="0">
+              <a:buNone/>
+            </a:pPr>
+            <a:r>
+              <a:rPr lang="en-US" sz="1500" dirty="0">
+                <a:solidFill>
+                  <a:srgbClr val="9E96C8"/>
+                </a:solidFill>
+                <a:latin typeface="Calibri" pitchFamily="34" charset="0"/>
+                <a:ea typeface="Calibri" pitchFamily="34" charset="-122"/>
+                <a:cs typeface="Calibri" pitchFamily="34" charset="-120"/>
+              </a:rPr>
+              <a:t>Урок 18 · 90 минут · Hugging Face + LLM</a:t>
+            </a:r>
+            <a:endParaRPr lang="en-US" sz="1500" dirty="0"/>
+          </a:p>
+        </p:txBody>
+      </p:sp>
+      <p:sp>
+        <p:nvSpPr>
+          <p:cNvPr id="6" name="Shape 4"/>
+          <p:cNvSpPr/>
+          <p:nvPr/>
+        </p:nvSpPr>
+        <p:spPr>
+          <a:xfrm>
+            <a:off x="9144000" y="1600200"/>
+            <a:ext cx="2651760" cy="685800"/>
           </a:xfrm>
           <a:prstGeom prst="roundRect">
             <a:avLst>
-              <a:gd name="adj" fmla="val 13333"/>
+              <a:gd name="adj" fmla="val 16000"/>
             </a:avLst>
           </a:prstGeom>
           <a:solidFill>
@@ -1255,14 +1589,14 @@
       </p:sp>
       <p:sp>
         <p:nvSpPr>
-          <p:cNvPr id="3" name="Text 1"/>
-          <p:cNvSpPr/>
-          <p:nvPr/>
-        </p:nvSpPr>
-        <p:spPr>
-          <a:xfrm>
-            <a:off x="9144000" y="1554480"/>
-            <a:ext cx="2743200" cy="548640"/>
+          <p:cNvPr id="7" name="Text 5"/>
+          <p:cNvSpPr/>
+          <p:nvPr/>
+        </p:nvSpPr>
+        <p:spPr>
+          <a:xfrm>
+            <a:off x="9144000" y="1600200"/>
+            <a:ext cx="2651760" cy="685800"/>
           </a:xfrm>
           <a:prstGeom prst="rect">
             <a:avLst/>
@@ -1278,7 +1612,7 @@
               <a:buNone/>
             </a:pPr>
             <a:r>
-              <a:rPr lang="en-US" sz="1400" b="1" dirty="0">
+              <a:rPr lang="en-US" sz="1500" b="1" dirty="0">
                 <a:solidFill>
                   <a:srgbClr val="FFFFFF"/>
                 </a:solidFill>
@@ -1288,24 +1622,24 @@
               </a:rPr>
               <a:t>ты — эксперт…</a:t>
             </a:r>
-            <a:endParaRPr lang="en-US" sz="1400" dirty="0"/>
-          </a:p>
-        </p:txBody>
-      </p:sp>
-      <p:sp>
-        <p:nvSpPr>
-          <p:cNvPr id="4" name="Shape 2"/>
-          <p:cNvSpPr/>
-          <p:nvPr/>
-        </p:nvSpPr>
-        <p:spPr>
-          <a:xfrm>
-            <a:off x="9144000" y="2286000"/>
-            <a:ext cx="2743200" cy="548640"/>
+            <a:endParaRPr lang="en-US" sz="1500" dirty="0"/>
+          </a:p>
+        </p:txBody>
+      </p:sp>
+      <p:sp>
+        <p:nvSpPr>
+          <p:cNvPr id="8" name="Shape 6"/>
+          <p:cNvSpPr/>
+          <p:nvPr/>
+        </p:nvSpPr>
+        <p:spPr>
+          <a:xfrm>
+            <a:off x="9144000" y="2496312"/>
+            <a:ext cx="2651760" cy="685800"/>
           </a:xfrm>
           <a:prstGeom prst="roundRect">
             <a:avLst>
-              <a:gd name="adj" fmla="val 13333"/>
+              <a:gd name="adj" fmla="val 16000"/>
             </a:avLst>
           </a:prstGeom>
           <a:solidFill>
@@ -1316,14 +1650,14 @@
       </p:sp>
       <p:sp>
         <p:nvSpPr>
-          <p:cNvPr id="5" name="Text 3"/>
-          <p:cNvSpPr/>
-          <p:nvPr/>
-        </p:nvSpPr>
-        <p:spPr>
-          <a:xfrm>
-            <a:off x="9144000" y="2286000"/>
-            <a:ext cx="2743200" cy="548640"/>
+          <p:cNvPr id="9" name="Text 7"/>
+          <p:cNvSpPr/>
+          <p:nvPr/>
+        </p:nvSpPr>
+        <p:spPr>
+          <a:xfrm>
+            <a:off x="9144000" y="2496312"/>
+            <a:ext cx="2651760" cy="685800"/>
           </a:xfrm>
           <a:prstGeom prst="rect">
             <a:avLst/>
@@ -1339,7 +1673,7 @@
               <a:buNone/>
             </a:pPr>
             <a:r>
-              <a:rPr lang="en-US" sz="1400" b="1" dirty="0">
+              <a:rPr lang="en-US" sz="1500" b="1" dirty="0">
                 <a:solidFill>
                   <a:srgbClr val="FFFFFF"/>
                 </a:solidFill>
@@ -1349,24 +1683,24 @@
               </a:rPr>
               <a:t>пример → ответ</a:t>
             </a:r>
-            <a:endParaRPr lang="en-US" sz="1400" dirty="0"/>
-          </a:p>
-        </p:txBody>
-      </p:sp>
-      <p:sp>
-        <p:nvSpPr>
-          <p:cNvPr id="6" name="Shape 4"/>
-          <p:cNvSpPr/>
-          <p:nvPr/>
-        </p:nvSpPr>
-        <p:spPr>
-          <a:xfrm>
-            <a:off x="9144000" y="3017520"/>
-            <a:ext cx="2743200" cy="548640"/>
+            <a:endParaRPr lang="en-US" sz="1500" dirty="0"/>
+          </a:p>
+        </p:txBody>
+      </p:sp>
+      <p:sp>
+        <p:nvSpPr>
+          <p:cNvPr id="10" name="Shape 8"/>
+          <p:cNvSpPr/>
+          <p:nvPr/>
+        </p:nvSpPr>
+        <p:spPr>
+          <a:xfrm>
+            <a:off x="9144000" y="3392424"/>
+            <a:ext cx="2651760" cy="685800"/>
           </a:xfrm>
           <a:prstGeom prst="roundRect">
             <a:avLst>
-              <a:gd name="adj" fmla="val 13333"/>
+              <a:gd name="adj" fmla="val 16000"/>
             </a:avLst>
           </a:prstGeom>
           <a:solidFill>
@@ -1377,14 +1711,14 @@
       </p:sp>
       <p:sp>
         <p:nvSpPr>
-          <p:cNvPr id="7" name="Text 5"/>
-          <p:cNvSpPr/>
-          <p:nvPr/>
-        </p:nvSpPr>
-        <p:spPr>
-          <a:xfrm>
-            <a:off x="9144000" y="3017520"/>
-            <a:ext cx="2743200" cy="548640"/>
+          <p:cNvPr id="11" name="Text 9"/>
+          <p:cNvSpPr/>
+          <p:nvPr/>
+        </p:nvSpPr>
+        <p:spPr>
+          <a:xfrm>
+            <a:off x="9144000" y="3392424"/>
+            <a:ext cx="2651760" cy="685800"/>
           </a:xfrm>
           <a:prstGeom prst="rect">
             <a:avLst/>
@@ -1400,7 +1734,7 @@
               <a:buNone/>
             </a:pPr>
             <a:r>
-              <a:rPr lang="en-US" sz="1400" b="1" dirty="0">
+              <a:rPr lang="en-US" sz="1500" b="1" dirty="0">
                 <a:solidFill>
                   <a:srgbClr val="17132E"/>
                 </a:solidFill>
@@ -1409,162 +1743,6 @@
                 <a:cs typeface="Calibri" pitchFamily="34" charset="-120"/>
               </a:rPr>
               <a:t>рассуждай по шагам</a:t>
-            </a:r>
-            <a:endParaRPr lang="en-US" sz="1400" dirty="0"/>
-          </a:p>
-        </p:txBody>
-      </p:sp>
-      <p:sp>
-        <p:nvSpPr>
-          <p:cNvPr id="8" name="Text 6"/>
-          <p:cNvSpPr/>
-          <p:nvPr/>
-        </p:nvSpPr>
-        <p:spPr>
-          <a:xfrm>
-            <a:off x="594360" y="1554480"/>
-            <a:ext cx="7772400" cy="365760"/>
-          </a:xfrm>
-          <a:prstGeom prst="rect">
-            <a:avLst/>
-          </a:prstGeom>
-          <a:noFill/>
-          <a:ln/>
-        </p:spPr>
-        <p:txBody>
-          <a:bodyPr wrap="square" rtlCol="0" anchor="t"/>
-          <a:lstStyle/>
-          <a:p>
-            <a:pPr indent="0" marL="0">
-              <a:buNone/>
-            </a:pPr>
-            <a:r>
-              <a:rPr lang="en-US" sz="1400" b="1" spc="200" kern="0" dirty="0">
-                <a:solidFill>
-                  <a:srgbClr val="27D3EE"/>
-                </a:solidFill>
-                <a:latin typeface="Calibri" pitchFamily="34" charset="0"/>
-                <a:ea typeface="Calibri" pitchFamily="34" charset="-122"/>
-                <a:cs typeface="Calibri" pitchFamily="34" charset="-120"/>
-              </a:rPr>
-              <a:t>ФАЗА 4 · НЕДЕЛЯ 9 · ПРАКТИКА + КОНКУРС</a:t>
-            </a:r>
-            <a:endParaRPr lang="en-US" sz="1400" dirty="0"/>
-          </a:p>
-        </p:txBody>
-      </p:sp>
-      <p:sp>
-        <p:nvSpPr>
-          <p:cNvPr id="9" name="Text 7"/>
-          <p:cNvSpPr/>
-          <p:nvPr/>
-        </p:nvSpPr>
-        <p:spPr>
-          <a:xfrm>
-            <a:off x="594360" y="2011680"/>
-            <a:ext cx="8229600" cy="914400"/>
-          </a:xfrm>
-          <a:prstGeom prst="rect">
-            <a:avLst/>
-          </a:prstGeom>
-          <a:noFill/>
-          <a:ln/>
-        </p:spPr>
-        <p:txBody>
-          <a:bodyPr wrap="square" rtlCol="0" anchor="t"/>
-          <a:lstStyle/>
-          <a:p>
-            <a:pPr indent="0" marL="0">
-              <a:buNone/>
-            </a:pPr>
-            <a:r>
-              <a:rPr lang="en-US" sz="4800" b="1" dirty="0">
-                <a:solidFill>
-                  <a:srgbClr val="FFFFFF"/>
-                </a:solidFill>
-                <a:latin typeface="Calibri" pitchFamily="34" charset="0"/>
-                <a:ea typeface="Calibri" pitchFamily="34" charset="-122"/>
-                <a:cs typeface="Calibri" pitchFamily="34" charset="-120"/>
-              </a:rPr>
-              <a:t>LLM на практике</a:t>
-            </a:r>
-            <a:endParaRPr lang="en-US" sz="4800" dirty="0"/>
-          </a:p>
-        </p:txBody>
-      </p:sp>
-      <p:sp>
-        <p:nvSpPr>
-          <p:cNvPr id="10" name="Text 8"/>
-          <p:cNvSpPr/>
-          <p:nvPr/>
-        </p:nvSpPr>
-        <p:spPr>
-          <a:xfrm>
-            <a:off x="594360" y="3108960"/>
-            <a:ext cx="8229600" cy="548640"/>
-          </a:xfrm>
-          <a:prstGeom prst="rect">
-            <a:avLst/>
-          </a:prstGeom>
-          <a:noFill/>
-          <a:ln/>
-        </p:spPr>
-        <p:txBody>
-          <a:bodyPr wrap="square" rtlCol="0" anchor="t"/>
-          <a:lstStyle/>
-          <a:p>
-            <a:pPr indent="0" marL="0">
-              <a:buNone/>
-            </a:pPr>
-            <a:r>
-              <a:rPr lang="en-US" sz="2400" dirty="0">
-                <a:solidFill>
-                  <a:srgbClr val="D9D4F2"/>
-                </a:solidFill>
-                <a:latin typeface="Calibri" pitchFamily="34" charset="0"/>
-                <a:ea typeface="Calibri" pitchFamily="34" charset="-122"/>
-                <a:cs typeface="Calibri" pitchFamily="34" charset="-120"/>
-              </a:rPr>
-              <a:t>Промптинг · классификация · свой бот</a:t>
-            </a:r>
-            <a:endParaRPr lang="en-US" sz="2400" dirty="0"/>
-          </a:p>
-        </p:txBody>
-      </p:sp>
-      <p:sp>
-        <p:nvSpPr>
-          <p:cNvPr id="11" name="Text 9"/>
-          <p:cNvSpPr/>
-          <p:nvPr/>
-        </p:nvSpPr>
-        <p:spPr>
-          <a:xfrm>
-            <a:off x="594360" y="4023360"/>
-            <a:ext cx="8229600" cy="365760"/>
-          </a:xfrm>
-          <a:prstGeom prst="rect">
-            <a:avLst/>
-          </a:prstGeom>
-          <a:noFill/>
-          <a:ln/>
-        </p:spPr>
-        <p:txBody>
-          <a:bodyPr wrap="square" rtlCol="0" anchor="t"/>
-          <a:lstStyle/>
-          <a:p>
-            <a:pPr indent="0" marL="0">
-              <a:buNone/>
-            </a:pPr>
-            <a:r>
-              <a:rPr lang="en-US" sz="1500" dirty="0">
-                <a:solidFill>
-                  <a:srgbClr val="9E96C8"/>
-                </a:solidFill>
-                <a:latin typeface="Calibri" pitchFamily="34" charset="0"/>
-                <a:ea typeface="Calibri" pitchFamily="34" charset="-122"/>
-                <a:cs typeface="Calibri" pitchFamily="34" charset="-120"/>
-              </a:rPr>
-              <a:t>Урок 18 · 90 минут · Hugging Face + LLM</a:t>
             </a:r>
             <a:endParaRPr lang="en-US" sz="1500" dirty="0"/>
           </a:p>
@@ -1611,7 +1789,46 @@
         <p:spPr>
           <a:xfrm>
             <a:off x="594360" y="457200"/>
-            <a:ext cx="11002975" cy="320040"/>
+            <a:ext cx="10972800" cy="320040"/>
+          </a:xfrm>
+          <a:prstGeom prst="rect">
+            <a:avLst/>
+          </a:prstGeom>
+          <a:noFill/>
+          <a:ln/>
+        </p:spPr>
+        <p:txBody>
+          <a:bodyPr wrap="square" rtlCol="0" anchor="ctr"/>
+          <a:lstStyle/>
+          <a:p>
+            <a:pPr indent="0" marL="0">
+              <a:buNone/>
+            </a:pPr>
+            <a:r>
+              <a:rPr lang="en-US" sz="1300" b="1" spc="200" kern="0" dirty="0">
+                <a:solidFill>
+                  <a:srgbClr val="27D3EE"/>
+                </a:solidFill>
+                <a:latin typeface="Calibri" pitchFamily="34" charset="0"/>
+                <a:ea typeface="Calibri" pitchFamily="34" charset="-122"/>
+                <a:cs typeface="Calibri" pitchFamily="34" charset="-120"/>
+              </a:rPr>
+              <a:t>ВОВЛЕЧЕНИЕ · 0–10 МИН</a:t>
+            </a:r>
+            <a:endParaRPr lang="en-US" sz="1300" dirty="0"/>
+          </a:p>
+        </p:txBody>
+      </p:sp>
+      <p:sp>
+        <p:nvSpPr>
+          <p:cNvPr id="3" name="Text 1"/>
+          <p:cNvSpPr/>
+          <p:nvPr/>
+        </p:nvSpPr>
+        <p:spPr>
+          <a:xfrm>
+            <a:off x="594360" y="749808"/>
+            <a:ext cx="10972800" cy="868680"/>
           </a:xfrm>
           <a:prstGeom prst="rect">
             <a:avLst/>
@@ -1627,46 +1844,7 @@
               <a:buNone/>
             </a:pPr>
             <a:r>
-              <a:rPr lang="en-US" sz="1300" b="1" spc="200" kern="0" dirty="0">
-                <a:solidFill>
-                  <a:srgbClr val="27D3EE"/>
-                </a:solidFill>
-                <a:latin typeface="Calibri" pitchFamily="34" charset="0"/>
-                <a:ea typeface="Calibri" pitchFamily="34" charset="-122"/>
-                <a:cs typeface="Calibri" pitchFamily="34" charset="-120"/>
-              </a:rPr>
-              <a:t>ВОВЛЕЧЕНИЕ · 0–10 МИН</a:t>
-            </a:r>
-            <a:endParaRPr lang="en-US" sz="1300" dirty="0"/>
-          </a:p>
-        </p:txBody>
-      </p:sp>
-      <p:sp>
-        <p:nvSpPr>
-          <p:cNvPr id="3" name="Text 1"/>
-          <p:cNvSpPr/>
-          <p:nvPr/>
-        </p:nvSpPr>
-        <p:spPr>
-          <a:xfrm>
-            <a:off x="594360" y="749808"/>
-            <a:ext cx="11002975" cy="822960"/>
-          </a:xfrm>
-          <a:prstGeom prst="rect">
-            <a:avLst/>
-          </a:prstGeom>
-          <a:noFill/>
-          <a:ln/>
-        </p:spPr>
-        <p:txBody>
-          <a:bodyPr wrap="square" rtlCol="0" anchor="t"/>
-          <a:lstStyle/>
-          <a:p>
-            <a:pPr indent="0" marL="0">
-              <a:buNone/>
-            </a:pPr>
-            <a:r>
-              <a:rPr lang="en-US" sz="3000" b="1" dirty="0">
+              <a:rPr lang="en-US" sz="3400" b="1" dirty="0">
                 <a:solidFill>
                   <a:srgbClr val="FFFFFF"/>
                 </a:solidFill>
@@ -1674,165 +1852,65 @@
                 <a:ea typeface="Calibri" pitchFamily="34" charset="-122"/>
                 <a:cs typeface="Calibri" pitchFamily="34" charset="-120"/>
               </a:rPr>
-              <a:t>Плохой промпт vs хороший</a:t>
-            </a:r>
-            <a:endParaRPr lang="en-US" sz="3000" dirty="0"/>
-          </a:p>
-        </p:txBody>
-      </p:sp>
-      <p:sp>
-        <p:nvSpPr>
-          <p:cNvPr id="4" name="Shape 2"/>
-          <p:cNvSpPr/>
-          <p:nvPr/>
-        </p:nvSpPr>
-        <p:spPr>
-          <a:xfrm>
-            <a:off x="594360" y="2103120"/>
-            <a:ext cx="5212080" cy="3383280"/>
+              <a:t>5000 отзывов в день — как разобрать?</a:t>
+            </a:r>
+            <a:endParaRPr lang="en-US" sz="3400" dirty="0"/>
+          </a:p>
+        </p:txBody>
+      </p:sp>
+      <p:sp>
+        <p:nvSpPr>
+          <p:cNvPr id="4" name="Text 2"/>
+          <p:cNvSpPr/>
+          <p:nvPr/>
+        </p:nvSpPr>
+        <p:spPr>
+          <a:xfrm>
+            <a:off x="10241280" y="6382512"/>
+            <a:ext cx="1371600" cy="274320"/>
+          </a:xfrm>
+          <a:prstGeom prst="rect">
+            <a:avLst/>
+          </a:prstGeom>
+          <a:noFill/>
+          <a:ln/>
+        </p:spPr>
+        <p:txBody>
+          <a:bodyPr wrap="square" rtlCol="0" anchor="ctr"/>
+          <a:lstStyle/>
+          <a:p>
+            <a:pPr algn="r" indent="0" marL="0">
+              <a:buNone/>
+            </a:pPr>
+            <a:r>
+              <a:rPr lang="en-US" sz="1200" dirty="0">
+                <a:solidFill>
+                  <a:srgbClr val="9E96C8"/>
+                </a:solidFill>
+                <a:latin typeface="Calibri" pitchFamily="34" charset="0"/>
+                <a:ea typeface="Calibri" pitchFamily="34" charset="-122"/>
+                <a:cs typeface="Calibri" pitchFamily="34" charset="-120"/>
+              </a:rPr>
+              <a:t>Урок 18</a:t>
+            </a:r>
+            <a:endParaRPr lang="en-US" sz="1200" dirty="0"/>
+          </a:p>
+        </p:txBody>
+      </p:sp>
+      <p:sp>
+        <p:nvSpPr>
+          <p:cNvPr id="5" name="Shape 3"/>
+          <p:cNvSpPr/>
+          <p:nvPr/>
+        </p:nvSpPr>
+        <p:spPr>
+          <a:xfrm>
+            <a:off x="594360" y="1965960"/>
+            <a:ext cx="11000232" cy="914400"/>
           </a:xfrm>
           <a:prstGeom prst="roundRect">
             <a:avLst>
-              <a:gd name="adj" fmla="val 3243"/>
-            </a:avLst>
-          </a:prstGeom>
-          <a:solidFill>
-            <a:srgbClr val="2C2552"/>
-          </a:solidFill>
-          <a:ln/>
-        </p:spPr>
-      </p:sp>
-      <p:sp>
-        <p:nvSpPr>
-          <p:cNvPr id="5" name="Text 3"/>
-          <p:cNvSpPr/>
-          <p:nvPr/>
-        </p:nvSpPr>
-        <p:spPr>
-          <a:xfrm>
-            <a:off x="960120" y="2377440"/>
-            <a:ext cx="4572000" cy="457200"/>
-          </a:xfrm>
-          <a:prstGeom prst="rect">
-            <a:avLst/>
-          </a:prstGeom>
-          <a:noFill/>
-          <a:ln/>
-        </p:spPr>
-        <p:txBody>
-          <a:bodyPr wrap="square" rtlCol="0" anchor="t"/>
-          <a:lstStyle/>
-          <a:p>
-            <a:pPr indent="0" marL="0">
-              <a:buNone/>
-            </a:pPr>
-            <a:r>
-              <a:rPr lang="en-US" sz="1900" b="1" dirty="0">
-                <a:solidFill>
-                  <a:srgbClr val="FF7A8A"/>
-                </a:solidFill>
-                <a:latin typeface="Calibri" pitchFamily="34" charset="0"/>
-                <a:ea typeface="Calibri" pitchFamily="34" charset="-122"/>
-                <a:cs typeface="Calibri" pitchFamily="34" charset="-120"/>
-              </a:rPr>
-              <a:t>Расплывчато</a:t>
-            </a:r>
-            <a:endParaRPr lang="en-US" sz="1900" dirty="0"/>
-          </a:p>
-        </p:txBody>
-      </p:sp>
-      <p:sp>
-        <p:nvSpPr>
-          <p:cNvPr id="6" name="Text 4"/>
-          <p:cNvSpPr/>
-          <p:nvPr/>
-        </p:nvSpPr>
-        <p:spPr>
-          <a:xfrm>
-            <a:off x="960120" y="2926080"/>
-            <a:ext cx="4572000" cy="640080"/>
-          </a:xfrm>
-          <a:prstGeom prst="rect">
-            <a:avLst/>
-          </a:prstGeom>
-          <a:noFill/>
-          <a:ln/>
-        </p:spPr>
-        <p:txBody>
-          <a:bodyPr wrap="square" rtlCol="0" anchor="t"/>
-          <a:lstStyle/>
-          <a:p>
-            <a:pPr indent="0" marL="0">
-              <a:buNone/>
-            </a:pPr>
-            <a:r>
-              <a:rPr lang="en-US" sz="2000" i="1" dirty="0">
-                <a:solidFill>
-                  <a:srgbClr val="D9D4F2"/>
-                </a:solidFill>
-                <a:latin typeface="Calibri" pitchFamily="34" charset="0"/>
-                <a:ea typeface="Calibri" pitchFamily="34" charset="-122"/>
-                <a:cs typeface="Calibri" pitchFamily="34" charset="-120"/>
-              </a:rPr>
-              <a:t>«напиши про собак»</a:t>
-            </a:r>
-            <a:endParaRPr lang="en-US" sz="2000" dirty="0"/>
-          </a:p>
-        </p:txBody>
-      </p:sp>
-      <p:sp>
-        <p:nvSpPr>
-          <p:cNvPr id="7" name="Text 5"/>
-          <p:cNvSpPr/>
-          <p:nvPr/>
-        </p:nvSpPr>
-        <p:spPr>
-          <a:xfrm>
-            <a:off x="960120" y="4206240"/>
-            <a:ext cx="4572000" cy="548640"/>
-          </a:xfrm>
-          <a:prstGeom prst="rect">
-            <a:avLst/>
-          </a:prstGeom>
-          <a:noFill/>
-          <a:ln/>
-        </p:spPr>
-        <p:txBody>
-          <a:bodyPr wrap="square" rtlCol="0" anchor="t"/>
-          <a:lstStyle/>
-          <a:p>
-            <a:pPr indent="0" marL="0">
-              <a:buNone/>
-            </a:pPr>
-            <a:r>
-              <a:rPr lang="en-US" sz="1600" dirty="0">
-                <a:solidFill>
-                  <a:srgbClr val="9E96C8"/>
-                </a:solidFill>
-                <a:latin typeface="Calibri" pitchFamily="34" charset="0"/>
-                <a:ea typeface="Calibri" pitchFamily="34" charset="-122"/>
-                <a:cs typeface="Calibri" pitchFamily="34" charset="-120"/>
-              </a:rPr>
-              <a:t>→ общий, скучный ответ</a:t>
-            </a:r>
-            <a:endParaRPr lang="en-US" sz="1600" dirty="0"/>
-          </a:p>
-        </p:txBody>
-      </p:sp>
-      <p:sp>
-        <p:nvSpPr>
-          <p:cNvPr id="8" name="Shape 6"/>
-          <p:cNvSpPr/>
-          <p:nvPr/>
-        </p:nvSpPr>
-        <p:spPr>
-          <a:xfrm>
-            <a:off x="6446520" y="2103120"/>
-            <a:ext cx="5150815" cy="3383280"/>
-          </a:xfrm>
-          <a:prstGeom prst="roundRect">
-            <a:avLst>
-              <a:gd name="adj" fmla="val 3243"/>
+              <a:gd name="adj" fmla="val 12000"/>
             </a:avLst>
           </a:prstGeom>
           <a:solidFill>
@@ -1843,14 +1921,178 @@
       </p:sp>
       <p:sp>
         <p:nvSpPr>
+          <p:cNvPr id="6" name="Text 4"/>
+          <p:cNvSpPr/>
+          <p:nvPr/>
+        </p:nvSpPr>
+        <p:spPr>
+          <a:xfrm>
+            <a:off x="868680" y="1965960"/>
+            <a:ext cx="10424160" cy="914400"/>
+          </a:xfrm>
+          <a:prstGeom prst="rect">
+            <a:avLst/>
+          </a:prstGeom>
+          <a:noFill/>
+          <a:ln/>
+        </p:spPr>
+        <p:txBody>
+          <a:bodyPr wrap="square" rtlCol="0" anchor="ctr"/>
+          <a:lstStyle/>
+          <a:p>
+            <a:pPr indent="0" marL="0">
+              <a:buNone/>
+            </a:pPr>
+            <a:r>
+              <a:rPr lang="en-US" sz="1700" b="1" dirty="0">
+                <a:solidFill>
+                  <a:srgbClr val="FF7A8A"/>
+                </a:solidFill>
+                <a:latin typeface="Calibri" pitchFamily="34" charset="0"/>
+                <a:ea typeface="Calibri" pitchFamily="34" charset="-122"/>
+                <a:cs typeface="Calibri" pitchFamily="34" charset="-120"/>
+              </a:rPr>
+              <a:t>Проблема:  </a:t>
+            </a:r>
+            <a:pPr indent="0" marL="0">
+              <a:buNone/>
+            </a:pPr>
+            <a:r>
+              <a:rPr lang="en-US" sz="1700" dirty="0">
+                <a:solidFill>
+                  <a:srgbClr val="D9D4F2"/>
+                </a:solidFill>
+                <a:latin typeface="Calibri" pitchFamily="34" charset="0"/>
+                <a:ea typeface="Calibri" pitchFamily="34" charset="-122"/>
+                <a:cs typeface="Calibri" pitchFamily="34" charset="-120"/>
+              </a:rPr>
+              <a:t>магазин получает тысячи отзывов в день. Прочитать вручную — это недели работы.</a:t>
+            </a:r>
+            <a:endParaRPr lang="en-US" sz="1700" dirty="0"/>
+          </a:p>
+        </p:txBody>
+      </p:sp>
+      <p:sp>
+        <p:nvSpPr>
+          <p:cNvPr id="7" name="Shape 5"/>
+          <p:cNvSpPr/>
+          <p:nvPr/>
+        </p:nvSpPr>
+        <p:spPr>
+          <a:xfrm>
+            <a:off x="594360" y="3200400"/>
+            <a:ext cx="11000232" cy="1874520"/>
+          </a:xfrm>
+          <a:prstGeom prst="roundRect">
+            <a:avLst>
+              <a:gd name="adj" fmla="val 5854"/>
+            </a:avLst>
+          </a:prstGeom>
+          <a:solidFill>
+            <a:srgbClr val="0E0B22"/>
+          </a:solidFill>
+          <a:ln/>
+        </p:spPr>
+      </p:sp>
+      <p:sp>
+        <p:nvSpPr>
+          <p:cNvPr id="8" name="Text 6"/>
+          <p:cNvSpPr/>
+          <p:nvPr/>
+        </p:nvSpPr>
+        <p:spPr>
+          <a:xfrm>
+            <a:off x="914400" y="3429000"/>
+            <a:ext cx="10332720" cy="1371600"/>
+          </a:xfrm>
+          <a:prstGeom prst="rect">
+            <a:avLst/>
+          </a:prstGeom>
+          <a:noFill/>
+          <a:ln/>
+        </p:spPr>
+        <p:txBody>
+          <a:bodyPr wrap="square" rtlCol="0" anchor="t"/>
+          <a:lstStyle/>
+          <a:p>
+            <a:pPr indent="0" marL="0">
+              <a:buNone/>
+            </a:pPr>
+            <a:r>
+              <a:rPr lang="en-US" sz="1800" dirty="0">
+                <a:solidFill>
+                  <a:srgbClr val="27D3EE"/>
+                </a:solidFill>
+                <a:latin typeface="Consolas" pitchFamily="34" charset="0"/>
+                <a:ea typeface="Consolas" pitchFamily="34" charset="-122"/>
+                <a:cs typeface="Consolas" pitchFamily="34" charset="-120"/>
+              </a:rPr>
+              <a:t>from transformers import pipeline
+</a:t>
+            </a:r>
+            <a:endParaRPr lang="en-US" sz="1800" dirty="0"/>
+          </a:p>
+          <a:p>
+            <a:pPr indent="0" marL="0">
+              <a:buNone/>
+            </a:pPr>
+            <a:r>
+              <a:rPr lang="en-US" sz="1800" dirty="0">
+                <a:solidFill>
+                  <a:srgbClr val="27D3EE"/>
+                </a:solidFill>
+                <a:latin typeface="Consolas" pitchFamily="34" charset="0"/>
+                <a:ea typeface="Consolas" pitchFamily="34" charset="-122"/>
+                <a:cs typeface="Consolas" pitchFamily="34" charset="-120"/>
+              </a:rPr>
+              <a:t>sentiment = pipeline("sentiment-analysis")
+</a:t>
+            </a:r>
+            <a:endParaRPr lang="en-US" sz="1800" dirty="0"/>
+          </a:p>
+          <a:p>
+            <a:pPr indent="0" marL="0">
+              <a:buNone/>
+            </a:pPr>
+            <a:r>
+              <a:rPr lang="en-US" sz="1800" dirty="0">
+                <a:solidFill>
+                  <a:srgbClr val="27D3EE"/>
+                </a:solidFill>
+                <a:latin typeface="Consolas" pitchFamily="34" charset="0"/>
+                <a:ea typeface="Consolas" pitchFamily="34" charset="-122"/>
+                <a:cs typeface="Consolas" pitchFamily="34" charset="-120"/>
+              </a:rPr>
+              <a:t>sentiment("Отличный сервис!")   </a:t>
+            </a:r>
+            <a:pPr indent="0" marL="0">
+              <a:buNone/>
+            </a:pPr>
+            <a:r>
+              <a:rPr lang="en-US" sz="1800" dirty="0">
+                <a:solidFill>
+                  <a:srgbClr val="9E96C8"/>
+                </a:solidFill>
+                <a:latin typeface="Consolas" pitchFamily="34" charset="0"/>
+                <a:ea typeface="Consolas" pitchFamily="34" charset="-122"/>
+                <a:cs typeface="Consolas" pitchFamily="34" charset="-120"/>
+              </a:rPr>
+              <a:t># → POSITIVE 0.99</a:t>
+            </a:r>
+            <a:endParaRPr lang="en-US" sz="1800" dirty="0"/>
+          </a:p>
+        </p:txBody>
+      </p:sp>
+      <p:sp>
+        <p:nvSpPr>
           <p:cNvPr id="9" name="Text 7"/>
           <p:cNvSpPr/>
           <p:nvPr/>
         </p:nvSpPr>
         <p:spPr>
           <a:xfrm>
-            <a:off x="6812280" y="2377440"/>
-            <a:ext cx="4572000" cy="457200"/>
+            <a:off x="594360" y="5257800"/>
+            <a:ext cx="11000232" cy="457200"/>
           </a:xfrm>
           <a:prstGeom prst="rect">
             <a:avLst/>
@@ -1862,92 +2104,11 @@
           <a:bodyPr wrap="square" rtlCol="0" anchor="t"/>
           <a:lstStyle/>
           <a:p>
-            <a:pPr indent="0" marL="0">
-              <a:buNone/>
-            </a:pPr>
-            <a:r>
-              <a:rPr lang="en-US" sz="1900" b="1" dirty="0">
-                <a:solidFill>
-                  <a:srgbClr val="6EE7B7"/>
-                </a:solidFill>
-                <a:latin typeface="Calibri" pitchFamily="34" charset="0"/>
-                <a:ea typeface="Calibri" pitchFamily="34" charset="-122"/>
-                <a:cs typeface="Calibri" pitchFamily="34" charset="-120"/>
-              </a:rPr>
-              <a:t>Точно</a:t>
-            </a:r>
-            <a:endParaRPr lang="en-US" sz="1900" dirty="0"/>
-          </a:p>
-        </p:txBody>
-      </p:sp>
-      <p:sp>
-        <p:nvSpPr>
-          <p:cNvPr id="10" name="Text 8"/>
-          <p:cNvSpPr/>
-          <p:nvPr/>
-        </p:nvSpPr>
-        <p:spPr>
-          <a:xfrm>
-            <a:off x="6812280" y="2926080"/>
-            <a:ext cx="4572000" cy="1280160"/>
-          </a:xfrm>
-          <a:prstGeom prst="rect">
-            <a:avLst/>
-          </a:prstGeom>
-          <a:noFill/>
-          <a:ln/>
-        </p:spPr>
-        <p:txBody>
-          <a:bodyPr wrap="square" rtlCol="0" anchor="t"/>
-          <a:lstStyle/>
-          <a:p>
-            <a:pPr indent="0" marL="0">
-              <a:lnSpc>
-                <a:spcPct val="115000"/>
-              </a:lnSpc>
-              <a:buNone/>
-            </a:pPr>
-            <a:r>
-              <a:rPr lang="en-US" sz="1800" i="1" dirty="0">
-                <a:solidFill>
-                  <a:srgbClr val="D9D4F2"/>
-                </a:solidFill>
-                <a:latin typeface="Calibri" pitchFamily="34" charset="0"/>
-                <a:ea typeface="Calibri" pitchFamily="34" charset="-122"/>
-                <a:cs typeface="Calibri" pitchFamily="34" charset="-120"/>
-              </a:rPr>
-              <a:t>«Ты биолог. В 3 пунктах объясни школьнику, почему собаки виляют хвостом»</a:t>
-            </a:r>
-            <a:endParaRPr lang="en-US" sz="1800" dirty="0"/>
-          </a:p>
-        </p:txBody>
-      </p:sp>
-      <p:sp>
-        <p:nvSpPr>
-          <p:cNvPr id="11" name="Text 9"/>
-          <p:cNvSpPr/>
-          <p:nvPr/>
-        </p:nvSpPr>
-        <p:spPr>
-          <a:xfrm>
-            <a:off x="6812280" y="4663440"/>
-            <a:ext cx="4572000" cy="548640"/>
-          </a:xfrm>
-          <a:prstGeom prst="rect">
-            <a:avLst/>
-          </a:prstGeom>
-          <a:noFill/>
-          <a:ln/>
-        </p:spPr>
-        <p:txBody>
-          <a:bodyPr wrap="square" rtlCol="0" anchor="t"/>
-          <a:lstStyle/>
-          <a:p>
-            <a:pPr indent="0" marL="0">
-              <a:buNone/>
-            </a:pPr>
-            <a:r>
-              <a:rPr lang="en-US" sz="1600" dirty="0">
+            <a:pPr algn="ctr" indent="0" marL="0">
+              <a:buNone/>
+            </a:pPr>
+            <a:r>
+              <a:rPr lang="en-US" sz="1600" i="1" dirty="0">
                 <a:solidFill>
                   <a:srgbClr val="2DD4BF"/>
                 </a:solidFill>
@@ -1955,48 +2116,9 @@
                 <a:ea typeface="Calibri" pitchFamily="34" charset="-122"/>
                 <a:cs typeface="Calibri" pitchFamily="34" charset="-120"/>
               </a:rPr>
-              <a:t>→ точный, полезный ответ</a:t>
+              <a:t>Три строки — и модель читает отзывы за тебя. Ничего обучать не нужно.</a:t>
             </a:r>
             <a:endParaRPr lang="en-US" sz="1600" dirty="0"/>
-          </a:p>
-        </p:txBody>
-      </p:sp>
-      <p:sp>
-        <p:nvSpPr>
-          <p:cNvPr id="12" name="Text 10"/>
-          <p:cNvSpPr/>
-          <p:nvPr/>
-        </p:nvSpPr>
-        <p:spPr>
-          <a:xfrm>
-            <a:off x="10271455" y="6355080"/>
-            <a:ext cx="1371600" cy="274320"/>
-          </a:xfrm>
-          <a:prstGeom prst="rect">
-            <a:avLst/>
-          </a:prstGeom>
-          <a:noFill/>
-          <a:ln/>
-        </p:spPr>
-        <p:txBody>
-          <a:bodyPr wrap="square" rtlCol="0" anchor="t"/>
-          <a:lstStyle/>
-          <a:p>
-            <a:pPr algn="r" indent="0" marL="0">
-              <a:buNone/>
-            </a:pPr>
-            <a:r>
-              <a:rPr lang="en-US" sz="1100" dirty="0">
-                <a:solidFill>
-                  <a:srgbClr val="9E96C8"/>
-                </a:solidFill>
-                <a:latin typeface="Calibri" pitchFamily="34" charset="0"/>
-                <a:ea typeface="Calibri" pitchFamily="34" charset="-122"/>
-                <a:cs typeface="Calibri" pitchFamily="34" charset="-120"/>
-              </a:rPr>
-              <a:t>Урок 18</a:t>
-            </a:r>
-            <a:endParaRPr lang="en-US" sz="1100" dirty="0"/>
           </a:p>
         </p:txBody>
       </p:sp>
@@ -2041,7 +2163,46 @@
         <p:spPr>
           <a:xfrm>
             <a:off x="594360" y="457200"/>
-            <a:ext cx="11002975" cy="320040"/>
+            <a:ext cx="10972800" cy="320040"/>
+          </a:xfrm>
+          <a:prstGeom prst="rect">
+            <a:avLst/>
+          </a:prstGeom>
+          <a:noFill/>
+          <a:ln/>
+        </p:spPr>
+        <p:txBody>
+          <a:bodyPr wrap="square" rtlCol="0" anchor="ctr"/>
+          <a:lstStyle/>
+          <a:p>
+            <a:pPr indent="0" marL="0">
+              <a:buNone/>
+            </a:pPr>
+            <a:r>
+              <a:rPr lang="en-US" sz="1300" b="1" spc="200" kern="0" dirty="0">
+                <a:solidFill>
+                  <a:srgbClr val="27D3EE"/>
+                </a:solidFill>
+                <a:latin typeface="Calibri" pitchFamily="34" charset="0"/>
+                <a:ea typeface="Calibri" pitchFamily="34" charset="-122"/>
+                <a:cs typeface="Calibri" pitchFamily="34" charset="-120"/>
+              </a:rPr>
+              <a:t>ИДЕЯ</a:t>
+            </a:r>
+            <a:endParaRPr lang="en-US" sz="1300" dirty="0"/>
+          </a:p>
+        </p:txBody>
+      </p:sp>
+      <p:sp>
+        <p:nvSpPr>
+          <p:cNvPr id="3" name="Text 1"/>
+          <p:cNvSpPr/>
+          <p:nvPr/>
+        </p:nvSpPr>
+        <p:spPr>
+          <a:xfrm>
+            <a:off x="594360" y="749808"/>
+            <a:ext cx="10972800" cy="868680"/>
           </a:xfrm>
           <a:prstGeom prst="rect">
             <a:avLst/>
@@ -2057,46 +2218,7 @@
               <a:buNone/>
             </a:pPr>
             <a:r>
-              <a:rPr lang="en-US" sz="1300" b="1" spc="200" kern="0" dirty="0">
-                <a:solidFill>
-                  <a:srgbClr val="27D3EE"/>
-                </a:solidFill>
-                <a:latin typeface="Calibri" pitchFamily="34" charset="0"/>
-                <a:ea typeface="Calibri" pitchFamily="34" charset="-122"/>
-                <a:cs typeface="Calibri" pitchFamily="34" charset="-120"/>
-              </a:rPr>
-              <a:t>ТЕОРИЯ</a:t>
-            </a:r>
-            <a:endParaRPr lang="en-US" sz="1300" dirty="0"/>
-          </a:p>
-        </p:txBody>
-      </p:sp>
-      <p:sp>
-        <p:nvSpPr>
-          <p:cNvPr id="3" name="Text 1"/>
-          <p:cNvSpPr/>
-          <p:nvPr/>
-        </p:nvSpPr>
-        <p:spPr>
-          <a:xfrm>
-            <a:off x="594360" y="749808"/>
-            <a:ext cx="11002975" cy="822960"/>
-          </a:xfrm>
-          <a:prstGeom prst="rect">
-            <a:avLst/>
-          </a:prstGeom>
-          <a:noFill/>
-          <a:ln/>
-        </p:spPr>
-        <p:txBody>
-          <a:bodyPr wrap="square" rtlCol="0" anchor="t"/>
-          <a:lstStyle/>
-          <a:p>
-            <a:pPr indent="0" marL="0">
-              <a:buNone/>
-            </a:pPr>
-            <a:r>
-              <a:rPr lang="en-US" sz="3000" b="1" dirty="0">
+              <a:rPr lang="en-US" sz="3400" b="1" dirty="0">
                 <a:solidFill>
                   <a:srgbClr val="FFFFFF"/>
                 </a:solidFill>
@@ -2104,26 +2226,140 @@
                 <a:ea typeface="Calibri" pitchFamily="34" charset="-122"/>
                 <a:cs typeface="Calibri" pitchFamily="34" charset="-120"/>
               </a:rPr>
-              <a:t>Три приёма промптинга</a:t>
-            </a:r>
-            <a:endParaRPr lang="en-US" sz="3000" dirty="0"/>
-          </a:p>
-        </p:txBody>
-      </p:sp>
-      <p:sp>
-        <p:nvSpPr>
-          <p:cNvPr id="4" name="Shape 2"/>
-          <p:cNvSpPr/>
-          <p:nvPr/>
-        </p:nvSpPr>
-        <p:spPr>
-          <a:xfrm>
-            <a:off x="594360" y="2194560"/>
-            <a:ext cx="3362858" cy="3291840"/>
+              <a:t>Промпт — это задание модели</a:t>
+            </a:r>
+            <a:endParaRPr lang="en-US" sz="3400" dirty="0"/>
+          </a:p>
+        </p:txBody>
+      </p:sp>
+      <p:sp>
+        <p:nvSpPr>
+          <p:cNvPr id="4" name="Text 2"/>
+          <p:cNvSpPr/>
+          <p:nvPr/>
+        </p:nvSpPr>
+        <p:spPr>
+          <a:xfrm>
+            <a:off x="10241280" y="6382512"/>
+            <a:ext cx="1371600" cy="274320"/>
+          </a:xfrm>
+          <a:prstGeom prst="rect">
+            <a:avLst/>
+          </a:prstGeom>
+          <a:noFill/>
+          <a:ln/>
+        </p:spPr>
+        <p:txBody>
+          <a:bodyPr wrap="square" rtlCol="0" anchor="ctr"/>
+          <a:lstStyle/>
+          <a:p>
+            <a:pPr algn="r" indent="0" marL="0">
+              <a:buNone/>
+            </a:pPr>
+            <a:r>
+              <a:rPr lang="en-US" sz="1200" dirty="0">
+                <a:solidFill>
+                  <a:srgbClr val="9E96C8"/>
+                </a:solidFill>
+                <a:latin typeface="Calibri" pitchFamily="34" charset="0"/>
+                <a:ea typeface="Calibri" pitchFamily="34" charset="-122"/>
+                <a:cs typeface="Calibri" pitchFamily="34" charset="-120"/>
+              </a:rPr>
+              <a:t>Урок 18</a:t>
+            </a:r>
+            <a:endParaRPr lang="en-US" sz="1200" dirty="0"/>
+          </a:p>
+        </p:txBody>
+      </p:sp>
+      <p:sp>
+        <p:nvSpPr>
+          <p:cNvPr id="5" name="Shape 3"/>
+          <p:cNvSpPr/>
+          <p:nvPr/>
+        </p:nvSpPr>
+        <p:spPr>
+          <a:xfrm>
+            <a:off x="594360" y="1874520"/>
+            <a:ext cx="11000232" cy="868680"/>
           </a:xfrm>
           <a:prstGeom prst="roundRect">
             <a:avLst>
-              <a:gd name="adj" fmla="val 3333"/>
+              <a:gd name="adj" fmla="val 12632"/>
+            </a:avLst>
+          </a:prstGeom>
+          <a:solidFill>
+            <a:srgbClr val="2C2552"/>
+          </a:solidFill>
+          <a:ln/>
+        </p:spPr>
+      </p:sp>
+      <p:sp>
+        <p:nvSpPr>
+          <p:cNvPr id="6" name="Text 4"/>
+          <p:cNvSpPr/>
+          <p:nvPr/>
+        </p:nvSpPr>
+        <p:spPr>
+          <a:xfrm>
+            <a:off x="868680" y="1874520"/>
+            <a:ext cx="10424160" cy="868680"/>
+          </a:xfrm>
+          <a:prstGeom prst="rect">
+            <a:avLst/>
+          </a:prstGeom>
+          <a:noFill/>
+          <a:ln/>
+        </p:spPr>
+        <p:txBody>
+          <a:bodyPr wrap="square" rtlCol="0" anchor="ctr"/>
+          <a:lstStyle/>
+          <a:p>
+            <a:pPr indent="0" marL="0">
+              <a:buNone/>
+            </a:pPr>
+            <a:r>
+              <a:rPr lang="en-US" sz="1600" b="1" dirty="0">
+                <a:solidFill>
+                  <a:srgbClr val="27D3EE"/>
+                </a:solidFill>
+                <a:latin typeface="Calibri" pitchFamily="34" charset="0"/>
+                <a:ea typeface="Calibri" pitchFamily="34" charset="-122"/>
+                <a:cs typeface="Calibri" pitchFamily="34" charset="-120"/>
+              </a:rPr>
+              <a:t>Аналогия:  </a:t>
+            </a:r>
+            <a:pPr indent="0" marL="0">
+              <a:buNone/>
+            </a:pPr>
+            <a:r>
+              <a:rPr lang="en-US" sz="1600" dirty="0">
+                <a:solidFill>
+                  <a:srgbClr val="D9D4F2"/>
+                </a:solidFill>
+                <a:latin typeface="Calibri" pitchFamily="34" charset="0"/>
+                <a:ea typeface="Calibri" pitchFamily="34" charset="-122"/>
+                <a:cs typeface="Calibri" pitchFamily="34" charset="-120"/>
+              </a:rPr>
+              <a:t>модель — как способный стажёр. Всё умеет, но мыслей не читает: каков вопрос — таков ответ.</a:t>
+            </a:r>
+            <a:endParaRPr lang="en-US" sz="1600" dirty="0"/>
+          </a:p>
+        </p:txBody>
+      </p:sp>
+      <p:sp>
+        <p:nvSpPr>
+          <p:cNvPr id="7" name="Shape 5"/>
+          <p:cNvSpPr/>
+          <p:nvPr/>
+        </p:nvSpPr>
+        <p:spPr>
+          <a:xfrm>
+            <a:off x="594360" y="2971800"/>
+            <a:ext cx="5212080" cy="2651760"/>
+          </a:xfrm>
+          <a:prstGeom prst="roundRect">
+            <a:avLst>
+              <a:gd name="adj" fmla="val 4138"/>
             </a:avLst>
           </a:prstGeom>
           <a:solidFill>
@@ -2134,73 +2370,14 @@
       </p:sp>
       <p:sp>
         <p:nvSpPr>
-          <p:cNvPr id="5" name="Shape 3"/>
-          <p:cNvSpPr/>
-          <p:nvPr/>
-        </p:nvSpPr>
-        <p:spPr>
-          <a:xfrm>
-            <a:off x="1864309" y="2514600"/>
-            <a:ext cx="822960" cy="822960"/>
-          </a:xfrm>
-          <a:prstGeom prst="ellipse">
-            <a:avLst/>
-          </a:prstGeom>
-          <a:solidFill>
-            <a:srgbClr val="5B4FC4"/>
-          </a:solidFill>
-          <a:ln/>
-        </p:spPr>
-      </p:sp>
-      <p:sp>
-        <p:nvSpPr>
-          <p:cNvPr id="6" name="Text 4"/>
-          <p:cNvSpPr/>
-          <p:nvPr/>
-        </p:nvSpPr>
-        <p:spPr>
-          <a:xfrm>
-            <a:off x="1864309" y="2514600"/>
-            <a:ext cx="822960" cy="822960"/>
-          </a:xfrm>
-          <a:prstGeom prst="rect">
-            <a:avLst/>
-          </a:prstGeom>
-          <a:noFill/>
-          <a:ln/>
-        </p:spPr>
-        <p:txBody>
-          <a:bodyPr wrap="square" rtlCol="0" anchor="ctr"/>
-          <a:lstStyle/>
-          <a:p>
-            <a:pPr algn="ctr" indent="0" marL="0">
-              <a:buNone/>
-            </a:pPr>
-            <a:r>
-              <a:rPr lang="en-US" sz="2800" b="1" dirty="0">
-                <a:solidFill>
-                  <a:srgbClr val="FFFFFF"/>
-                </a:solidFill>
-                <a:latin typeface="Calibri" pitchFamily="34" charset="0"/>
-                <a:ea typeface="Calibri" pitchFamily="34" charset="-122"/>
-                <a:cs typeface="Calibri" pitchFamily="34" charset="-120"/>
-              </a:rPr>
-              <a:t>1</a:t>
-            </a:r>
-            <a:endParaRPr lang="en-US" sz="2800" dirty="0"/>
-          </a:p>
-        </p:txBody>
-      </p:sp>
-      <p:sp>
-        <p:nvSpPr>
-          <p:cNvPr id="7" name="Text 5"/>
-          <p:cNvSpPr/>
-          <p:nvPr/>
-        </p:nvSpPr>
-        <p:spPr>
-          <a:xfrm>
-            <a:off x="777240" y="3566160"/>
-            <a:ext cx="2997098" cy="548640"/>
+          <p:cNvPr id="8" name="Text 6"/>
+          <p:cNvSpPr/>
+          <p:nvPr/>
+        </p:nvSpPr>
+        <p:spPr>
+          <a:xfrm>
+            <a:off x="914400" y="3200400"/>
+            <a:ext cx="4572000" cy="457200"/>
           </a:xfrm>
           <a:prstGeom prst="rect">
             <a:avLst/>
@@ -2212,34 +2389,34 @@
           <a:bodyPr wrap="square" rtlCol="0" anchor="t"/>
           <a:lstStyle/>
           <a:p>
-            <a:pPr algn="ctr" indent="0" marL="0">
-              <a:buNone/>
-            </a:pPr>
-            <a:r>
-              <a:rPr lang="en-US" sz="1900" b="1" dirty="0">
-                <a:solidFill>
-                  <a:srgbClr val="FFFFFF"/>
-                </a:solidFill>
-                <a:latin typeface="Calibri" pitchFamily="34" charset="0"/>
-                <a:ea typeface="Calibri" pitchFamily="34" charset="-122"/>
-                <a:cs typeface="Calibri" pitchFamily="34" charset="-120"/>
-              </a:rPr>
-              <a:t>Роль</a:t>
-            </a:r>
-            <a:endParaRPr lang="en-US" sz="1900" dirty="0"/>
-          </a:p>
-        </p:txBody>
-      </p:sp>
-      <p:sp>
-        <p:nvSpPr>
-          <p:cNvPr id="8" name="Text 6"/>
-          <p:cNvSpPr/>
-          <p:nvPr/>
-        </p:nvSpPr>
-        <p:spPr>
-          <a:xfrm>
-            <a:off x="822960" y="4160520"/>
-            <a:ext cx="2905658" cy="1188720"/>
+            <a:pPr indent="0" marL="0">
+              <a:buNone/>
+            </a:pPr>
+            <a:r>
+              <a:rPr lang="en-US" sz="1800" b="1" dirty="0">
+                <a:solidFill>
+                  <a:srgbClr val="FF7A8A"/>
+                </a:solidFill>
+                <a:latin typeface="Calibri" pitchFamily="34" charset="0"/>
+                <a:ea typeface="Calibri" pitchFamily="34" charset="-122"/>
+                <a:cs typeface="Calibri" pitchFamily="34" charset="-120"/>
+              </a:rPr>
+              <a:t>Расплывчато</a:t>
+            </a:r>
+            <a:endParaRPr lang="en-US" sz="1800" dirty="0"/>
+          </a:p>
+        </p:txBody>
+      </p:sp>
+      <p:sp>
+        <p:nvSpPr>
+          <p:cNvPr id="9" name="Text 7"/>
+          <p:cNvSpPr/>
+          <p:nvPr/>
+        </p:nvSpPr>
+        <p:spPr>
+          <a:xfrm>
+            <a:off x="914400" y="3794760"/>
+            <a:ext cx="4572000" cy="548640"/>
           </a:xfrm>
           <a:prstGeom prst="rect">
             <a:avLst/>
@@ -2251,14 +2428,11 @@
           <a:bodyPr wrap="square" rtlCol="0" anchor="t"/>
           <a:lstStyle/>
           <a:p>
-            <a:pPr algn="ctr" indent="0" marL="0">
-              <a:lnSpc>
-                <a:spcPct val="115000"/>
-              </a:lnSpc>
-              <a:buNone/>
-            </a:pPr>
-            <a:r>
-              <a:rPr lang="en-US" sz="1400" dirty="0">
+            <a:pPr indent="0" marL="0">
+              <a:buNone/>
+            </a:pPr>
+            <a:r>
+              <a:rPr lang="en-US" sz="1700" i="1" dirty="0">
                 <a:solidFill>
                   <a:srgbClr val="D9D4F2"/>
                 </a:solidFill>
@@ -2266,228 +2440,65 @@
                 <a:ea typeface="Calibri" pitchFamily="34" charset="-122"/>
                 <a:cs typeface="Calibri" pitchFamily="34" charset="-120"/>
               </a:rPr>
-              <a:t>«Ты — опытный …»</a:t>
-            </a:r>
-            <a:endParaRPr lang="en-US" sz="1400" dirty="0"/>
-          </a:p>
-          <a:p>
-            <a:pPr algn="ctr" indent="0" marL="0">
-              <a:lnSpc>
-                <a:spcPct val="115000"/>
-              </a:lnSpc>
-              <a:buNone/>
-            </a:pPr>
-            <a:r>
-              <a:rPr lang="en-US" sz="1400" dirty="0">
-                <a:solidFill>
-                  <a:srgbClr val="D9D4F2"/>
-                </a:solidFill>
-                <a:latin typeface="Calibri" pitchFamily="34" charset="0"/>
-                <a:ea typeface="Calibri" pitchFamily="34" charset="-122"/>
-                <a:cs typeface="Calibri" pitchFamily="34" charset="-120"/>
-              </a:rPr>
-              <a:t>задаёт тон и уровень</a:t>
-            </a:r>
-            <a:endParaRPr lang="en-US" sz="1400" dirty="0"/>
-          </a:p>
-        </p:txBody>
-      </p:sp>
-      <p:sp>
-        <p:nvSpPr>
-          <p:cNvPr id="9" name="Shape 7"/>
-          <p:cNvSpPr/>
-          <p:nvPr/>
-        </p:nvSpPr>
-        <p:spPr>
-          <a:xfrm>
-            <a:off x="4414418" y="2194560"/>
-            <a:ext cx="3362858" cy="3291840"/>
+              <a:t>«напиши про собак»</a:t>
+            </a:r>
+            <a:endParaRPr lang="en-US" sz="1700" dirty="0"/>
+          </a:p>
+        </p:txBody>
+      </p:sp>
+      <p:sp>
+        <p:nvSpPr>
+          <p:cNvPr id="10" name="Text 8"/>
+          <p:cNvSpPr/>
+          <p:nvPr/>
+        </p:nvSpPr>
+        <p:spPr>
+          <a:xfrm>
+            <a:off x="914400" y="4892040"/>
+            <a:ext cx="4572000" cy="457200"/>
+          </a:xfrm>
+          <a:prstGeom prst="rect">
+            <a:avLst/>
+          </a:prstGeom>
+          <a:noFill/>
+          <a:ln/>
+        </p:spPr>
+        <p:txBody>
+          <a:bodyPr wrap="square" rtlCol="0" anchor="t"/>
+          <a:lstStyle/>
+          <a:p>
+            <a:pPr indent="0" marL="0">
+              <a:buNone/>
+            </a:pPr>
+            <a:r>
+              <a:rPr lang="en-US" sz="1500" dirty="0">
+                <a:solidFill>
+                  <a:srgbClr val="9E96C8"/>
+                </a:solidFill>
+                <a:latin typeface="Calibri" pitchFamily="34" charset="0"/>
+                <a:ea typeface="Calibri" pitchFamily="34" charset="-122"/>
+                <a:cs typeface="Calibri" pitchFamily="34" charset="-120"/>
+              </a:rPr>
+              <a:t>→ общий, скучный ответ</a:t>
+            </a:r>
+            <a:endParaRPr lang="en-US" sz="1500" dirty="0"/>
+          </a:p>
+        </p:txBody>
+      </p:sp>
+      <p:sp>
+        <p:nvSpPr>
+          <p:cNvPr id="11" name="Shape 9"/>
+          <p:cNvSpPr/>
+          <p:nvPr/>
+        </p:nvSpPr>
+        <p:spPr>
+          <a:xfrm>
+            <a:off x="6382512" y="2971800"/>
+            <a:ext cx="5212080" cy="2651760"/>
           </a:xfrm>
           <a:prstGeom prst="roundRect">
             <a:avLst>
-              <a:gd name="adj" fmla="val 3333"/>
-            </a:avLst>
-          </a:prstGeom>
-          <a:solidFill>
-            <a:srgbClr val="2C2552"/>
-          </a:solidFill>
-          <a:ln/>
-        </p:spPr>
-      </p:sp>
-      <p:sp>
-        <p:nvSpPr>
-          <p:cNvPr id="10" name="Shape 8"/>
-          <p:cNvSpPr/>
-          <p:nvPr/>
-        </p:nvSpPr>
-        <p:spPr>
-          <a:xfrm>
-            <a:off x="5684368" y="2514600"/>
-            <a:ext cx="822960" cy="822960"/>
-          </a:xfrm>
-          <a:prstGeom prst="ellipse">
-            <a:avLst/>
-          </a:prstGeom>
-          <a:solidFill>
-            <a:srgbClr val="27D3EE"/>
-          </a:solidFill>
-          <a:ln/>
-        </p:spPr>
-      </p:sp>
-      <p:sp>
-        <p:nvSpPr>
-          <p:cNvPr id="11" name="Text 9"/>
-          <p:cNvSpPr/>
-          <p:nvPr/>
-        </p:nvSpPr>
-        <p:spPr>
-          <a:xfrm>
-            <a:off x="5684368" y="2514600"/>
-            <a:ext cx="822960" cy="822960"/>
-          </a:xfrm>
-          <a:prstGeom prst="rect">
-            <a:avLst/>
-          </a:prstGeom>
-          <a:noFill/>
-          <a:ln/>
-        </p:spPr>
-        <p:txBody>
-          <a:bodyPr wrap="square" rtlCol="0" anchor="ctr"/>
-          <a:lstStyle/>
-          <a:p>
-            <a:pPr algn="ctr" indent="0" marL="0">
-              <a:buNone/>
-            </a:pPr>
-            <a:r>
-              <a:rPr lang="en-US" sz="2800" b="1" dirty="0">
-                <a:solidFill>
-                  <a:srgbClr val="17132E"/>
-                </a:solidFill>
-                <a:latin typeface="Calibri" pitchFamily="34" charset="0"/>
-                <a:ea typeface="Calibri" pitchFamily="34" charset="-122"/>
-                <a:cs typeface="Calibri" pitchFamily="34" charset="-120"/>
-              </a:rPr>
-              <a:t>2</a:t>
-            </a:r>
-            <a:endParaRPr lang="en-US" sz="2800" dirty="0"/>
-          </a:p>
-        </p:txBody>
-      </p:sp>
-      <p:sp>
-        <p:nvSpPr>
-          <p:cNvPr id="12" name="Text 10"/>
-          <p:cNvSpPr/>
-          <p:nvPr/>
-        </p:nvSpPr>
-        <p:spPr>
-          <a:xfrm>
-            <a:off x="4597298" y="3566160"/>
-            <a:ext cx="2997098" cy="548640"/>
-          </a:xfrm>
-          <a:prstGeom prst="rect">
-            <a:avLst/>
-          </a:prstGeom>
-          <a:noFill/>
-          <a:ln/>
-        </p:spPr>
-        <p:txBody>
-          <a:bodyPr wrap="square" rtlCol="0" anchor="t"/>
-          <a:lstStyle/>
-          <a:p>
-            <a:pPr algn="ctr" indent="0" marL="0">
-              <a:buNone/>
-            </a:pPr>
-            <a:r>
-              <a:rPr lang="en-US" sz="1900" b="1" dirty="0">
-                <a:solidFill>
-                  <a:srgbClr val="27D3EE"/>
-                </a:solidFill>
-                <a:latin typeface="Calibri" pitchFamily="34" charset="0"/>
-                <a:ea typeface="Calibri" pitchFamily="34" charset="-122"/>
-                <a:cs typeface="Calibri" pitchFamily="34" charset="-120"/>
-              </a:rPr>
-              <a:t>Примеры</a:t>
-            </a:r>
-            <a:endParaRPr lang="en-US" sz="1900" dirty="0"/>
-          </a:p>
-        </p:txBody>
-      </p:sp>
-      <p:sp>
-        <p:nvSpPr>
-          <p:cNvPr id="13" name="Text 11"/>
-          <p:cNvSpPr/>
-          <p:nvPr/>
-        </p:nvSpPr>
-        <p:spPr>
-          <a:xfrm>
-            <a:off x="4643018" y="4160520"/>
-            <a:ext cx="2905658" cy="1188720"/>
-          </a:xfrm>
-          <a:prstGeom prst="rect">
-            <a:avLst/>
-          </a:prstGeom>
-          <a:noFill/>
-          <a:ln/>
-        </p:spPr>
-        <p:txBody>
-          <a:bodyPr wrap="square" rtlCol="0" anchor="t"/>
-          <a:lstStyle/>
-          <a:p>
-            <a:pPr algn="ctr" indent="0" marL="0">
-              <a:lnSpc>
-                <a:spcPct val="115000"/>
-              </a:lnSpc>
-              <a:buNone/>
-            </a:pPr>
-            <a:r>
-              <a:rPr lang="en-US" sz="1400" dirty="0">
-                <a:solidFill>
-                  <a:srgbClr val="D9D4F2"/>
-                </a:solidFill>
-                <a:latin typeface="Calibri" pitchFamily="34" charset="0"/>
-                <a:ea typeface="Calibri" pitchFamily="34" charset="-122"/>
-                <a:cs typeface="Calibri" pitchFamily="34" charset="-120"/>
-              </a:rPr>
-              <a:t>2–3 «вход → ответ» —</a:t>
-            </a:r>
-            <a:endParaRPr lang="en-US" sz="1400" dirty="0"/>
-          </a:p>
-          <a:p>
-            <a:pPr algn="ctr" indent="0" marL="0">
-              <a:lnSpc>
-                <a:spcPct val="115000"/>
-              </a:lnSpc>
-              <a:buNone/>
-            </a:pPr>
-            <a:r>
-              <a:rPr lang="en-US" sz="1400" dirty="0">
-                <a:solidFill>
-                  <a:srgbClr val="D9D4F2"/>
-                </a:solidFill>
-                <a:latin typeface="Calibri" pitchFamily="34" charset="0"/>
-                <a:ea typeface="Calibri" pitchFamily="34" charset="-122"/>
-                <a:cs typeface="Calibri" pitchFamily="34" charset="-120"/>
-              </a:rPr>
-              <a:t>модель ловит формат</a:t>
-            </a:r>
-            <a:endParaRPr lang="en-US" sz="1400" dirty="0"/>
-          </a:p>
-        </p:txBody>
-      </p:sp>
-      <p:sp>
-        <p:nvSpPr>
-          <p:cNvPr id="14" name="Shape 12"/>
-          <p:cNvSpPr/>
-          <p:nvPr/>
-        </p:nvSpPr>
-        <p:spPr>
-          <a:xfrm>
-            <a:off x="8234477" y="2194560"/>
-            <a:ext cx="3362858" cy="3291840"/>
-          </a:xfrm>
-          <a:prstGeom prst="roundRect">
-            <a:avLst>
-              <a:gd name="adj" fmla="val 3333"/>
+              <a:gd name="adj" fmla="val 4138"/>
             </a:avLst>
           </a:prstGeom>
           <a:solidFill>
@@ -2498,73 +2509,14 @@
       </p:sp>
       <p:sp>
         <p:nvSpPr>
-          <p:cNvPr id="15" name="Shape 13"/>
-          <p:cNvSpPr/>
-          <p:nvPr/>
-        </p:nvSpPr>
-        <p:spPr>
-          <a:xfrm>
-            <a:off x="9504426" y="2514600"/>
-            <a:ext cx="822960" cy="822960"/>
-          </a:xfrm>
-          <a:prstGeom prst="ellipse">
-            <a:avLst/>
-          </a:prstGeom>
-          <a:solidFill>
-            <a:srgbClr val="8B7DF5"/>
-          </a:solidFill>
-          <a:ln/>
-        </p:spPr>
-      </p:sp>
-      <p:sp>
-        <p:nvSpPr>
-          <p:cNvPr id="16" name="Text 14"/>
-          <p:cNvSpPr/>
-          <p:nvPr/>
-        </p:nvSpPr>
-        <p:spPr>
-          <a:xfrm>
-            <a:off x="9504426" y="2514600"/>
-            <a:ext cx="822960" cy="822960"/>
-          </a:xfrm>
-          <a:prstGeom prst="rect">
-            <a:avLst/>
-          </a:prstGeom>
-          <a:noFill/>
-          <a:ln/>
-        </p:spPr>
-        <p:txBody>
-          <a:bodyPr wrap="square" rtlCol="0" anchor="ctr"/>
-          <a:lstStyle/>
-          <a:p>
-            <a:pPr algn="ctr" indent="0" marL="0">
-              <a:buNone/>
-            </a:pPr>
-            <a:r>
-              <a:rPr lang="en-US" sz="2800" b="1" dirty="0">
-                <a:solidFill>
-                  <a:srgbClr val="FFFFFF"/>
-                </a:solidFill>
-                <a:latin typeface="Calibri" pitchFamily="34" charset="0"/>
-                <a:ea typeface="Calibri" pitchFamily="34" charset="-122"/>
-                <a:cs typeface="Calibri" pitchFamily="34" charset="-120"/>
-              </a:rPr>
-              <a:t>3</a:t>
-            </a:r>
-            <a:endParaRPr lang="en-US" sz="2800" dirty="0"/>
-          </a:p>
-        </p:txBody>
-      </p:sp>
-      <p:sp>
-        <p:nvSpPr>
-          <p:cNvPr id="17" name="Text 15"/>
-          <p:cNvSpPr/>
-          <p:nvPr/>
-        </p:nvSpPr>
-        <p:spPr>
-          <a:xfrm>
-            <a:off x="8417357" y="3566160"/>
-            <a:ext cx="2997098" cy="548640"/>
+          <p:cNvPr id="12" name="Text 10"/>
+          <p:cNvSpPr/>
+          <p:nvPr/>
+        </p:nvSpPr>
+        <p:spPr>
+          <a:xfrm>
+            <a:off x="6702552" y="3200400"/>
+            <a:ext cx="4572000" cy="457200"/>
           </a:xfrm>
           <a:prstGeom prst="rect">
             <a:avLst/>
@@ -2576,34 +2528,34 @@
           <a:bodyPr wrap="square" rtlCol="0" anchor="t"/>
           <a:lstStyle/>
           <a:p>
-            <a:pPr algn="ctr" indent="0" marL="0">
-              <a:buNone/>
-            </a:pPr>
-            <a:r>
-              <a:rPr lang="en-US" sz="1900" b="1" dirty="0">
-                <a:solidFill>
-                  <a:srgbClr val="FFFFFF"/>
-                </a:solidFill>
-                <a:latin typeface="Calibri" pitchFamily="34" charset="0"/>
-                <a:ea typeface="Calibri" pitchFamily="34" charset="-122"/>
-                <a:cs typeface="Calibri" pitchFamily="34" charset="-120"/>
-              </a:rPr>
-              <a:t>Цепочка мыслей</a:t>
-            </a:r>
-            <a:endParaRPr lang="en-US" sz="1900" dirty="0"/>
-          </a:p>
-        </p:txBody>
-      </p:sp>
-      <p:sp>
-        <p:nvSpPr>
-          <p:cNvPr id="18" name="Text 16"/>
-          <p:cNvSpPr/>
-          <p:nvPr/>
-        </p:nvSpPr>
-        <p:spPr>
-          <a:xfrm>
-            <a:off x="8463077" y="4160520"/>
-            <a:ext cx="2905658" cy="1188720"/>
+            <a:pPr indent="0" marL="0">
+              <a:buNone/>
+            </a:pPr>
+            <a:r>
+              <a:rPr lang="en-US" sz="1800" b="1" dirty="0">
+                <a:solidFill>
+                  <a:srgbClr val="2DD4BF"/>
+                </a:solidFill>
+                <a:latin typeface="Calibri" pitchFamily="34" charset="0"/>
+                <a:ea typeface="Calibri" pitchFamily="34" charset="-122"/>
+                <a:cs typeface="Calibri" pitchFamily="34" charset="-120"/>
+              </a:rPr>
+              <a:t>Точно</a:t>
+            </a:r>
+            <a:endParaRPr lang="en-US" sz="1800" dirty="0"/>
+          </a:p>
+        </p:txBody>
+      </p:sp>
+      <p:sp>
+        <p:nvSpPr>
+          <p:cNvPr id="13" name="Text 11"/>
+          <p:cNvSpPr/>
+          <p:nvPr/>
+        </p:nvSpPr>
+        <p:spPr>
+          <a:xfrm>
+            <a:off x="6702552" y="3794760"/>
+            <a:ext cx="4572000" cy="1005840"/>
           </a:xfrm>
           <a:prstGeom prst="rect">
             <a:avLst/>
@@ -2615,14 +2567,11 @@
           <a:bodyPr wrap="square" rtlCol="0" anchor="t"/>
           <a:lstStyle/>
           <a:p>
-            <a:pPr algn="ctr" indent="0" marL="0">
-              <a:lnSpc>
-                <a:spcPct val="115000"/>
-              </a:lnSpc>
-              <a:buNone/>
-            </a:pPr>
-            <a:r>
-              <a:rPr lang="en-US" sz="1400" dirty="0">
+            <a:pPr indent="0" marL="0">
+              <a:buNone/>
+            </a:pPr>
+            <a:r>
+              <a:rPr lang="en-US" sz="1600" i="1" dirty="0">
                 <a:solidFill>
                   <a:srgbClr val="D9D4F2"/>
                 </a:solidFill>
@@ -2630,42 +2579,22 @@
                 <a:ea typeface="Calibri" pitchFamily="34" charset="-122"/>
                 <a:cs typeface="Calibri" pitchFamily="34" charset="-120"/>
               </a:rPr>
-              <a:t>«рассуждай по шагам» —</a:t>
-            </a:r>
-            <a:endParaRPr lang="en-US" sz="1400" dirty="0"/>
-          </a:p>
-          <a:p>
-            <a:pPr algn="ctr" indent="0" marL="0">
-              <a:lnSpc>
-                <a:spcPct val="115000"/>
-              </a:lnSpc>
-              <a:buNone/>
-            </a:pPr>
-            <a:r>
-              <a:rPr lang="en-US" sz="1400" dirty="0">
-                <a:solidFill>
-                  <a:srgbClr val="D9D4F2"/>
-                </a:solidFill>
-                <a:latin typeface="Calibri" pitchFamily="34" charset="0"/>
-                <a:ea typeface="Calibri" pitchFamily="34" charset="-122"/>
-                <a:cs typeface="Calibri" pitchFamily="34" charset="-120"/>
-              </a:rPr>
-              <a:t>точнее на сложном</a:t>
-            </a:r>
-            <a:endParaRPr lang="en-US" sz="1400" dirty="0"/>
-          </a:p>
-        </p:txBody>
-      </p:sp>
-      <p:sp>
-        <p:nvSpPr>
-          <p:cNvPr id="19" name="Text 17"/>
-          <p:cNvSpPr/>
-          <p:nvPr/>
-        </p:nvSpPr>
-        <p:spPr>
-          <a:xfrm>
-            <a:off x="10271455" y="6355080"/>
-            <a:ext cx="1371600" cy="274320"/>
+              <a:t>«Ты биолог. В 3 пунктах объясни школьнику, почему собаки виляют хвостом»</a:t>
+            </a:r>
+            <a:endParaRPr lang="en-US" sz="1600" dirty="0"/>
+          </a:p>
+        </p:txBody>
+      </p:sp>
+      <p:sp>
+        <p:nvSpPr>
+          <p:cNvPr id="14" name="Text 12"/>
+          <p:cNvSpPr/>
+          <p:nvPr/>
+        </p:nvSpPr>
+        <p:spPr>
+          <a:xfrm>
+            <a:off x="6702552" y="4892040"/>
+            <a:ext cx="4572000" cy="457200"/>
           </a:xfrm>
           <a:prstGeom prst="rect">
             <a:avLst/>
@@ -2677,21 +2606,21 @@
           <a:bodyPr wrap="square" rtlCol="0" anchor="t"/>
           <a:lstStyle/>
           <a:p>
-            <a:pPr algn="r" indent="0" marL="0">
-              <a:buNone/>
-            </a:pPr>
-            <a:r>
-              <a:rPr lang="en-US" sz="1100" dirty="0">
-                <a:solidFill>
-                  <a:srgbClr val="9E96C8"/>
-                </a:solidFill>
-                <a:latin typeface="Calibri" pitchFamily="34" charset="0"/>
-                <a:ea typeface="Calibri" pitchFamily="34" charset="-122"/>
-                <a:cs typeface="Calibri" pitchFamily="34" charset="-120"/>
-              </a:rPr>
-              <a:t>Урок 18</a:t>
-            </a:r>
-            <a:endParaRPr lang="en-US" sz="1100" dirty="0"/>
+            <a:pPr indent="0" marL="0">
+              <a:buNone/>
+            </a:pPr>
+            <a:r>
+              <a:rPr lang="en-US" sz="1500" dirty="0">
+                <a:solidFill>
+                  <a:srgbClr val="2DD4BF"/>
+                </a:solidFill>
+                <a:latin typeface="Calibri" pitchFamily="34" charset="0"/>
+                <a:ea typeface="Calibri" pitchFamily="34" charset="-122"/>
+                <a:cs typeface="Calibri" pitchFamily="34" charset="-120"/>
+              </a:rPr>
+              <a:t>→ точный, полезный ответ</a:t>
+            </a:r>
+            <a:endParaRPr lang="en-US" sz="1500" dirty="0"/>
           </a:p>
         </p:txBody>
       </p:sp>
@@ -2736,7 +2665,46 @@
         <p:spPr>
           <a:xfrm>
             <a:off x="594360" y="457200"/>
-            <a:ext cx="11002975" cy="320040"/>
+            <a:ext cx="10972800" cy="320040"/>
+          </a:xfrm>
+          <a:prstGeom prst="rect">
+            <a:avLst/>
+          </a:prstGeom>
+          <a:noFill/>
+          <a:ln/>
+        </p:spPr>
+        <p:txBody>
+          <a:bodyPr wrap="square" rtlCol="0" anchor="ctr"/>
+          <a:lstStyle/>
+          <a:p>
+            <a:pPr indent="0" marL="0">
+              <a:buNone/>
+            </a:pPr>
+            <a:r>
+              <a:rPr lang="en-US" sz="1300" b="1" spc="200" kern="0" dirty="0">
+                <a:solidFill>
+                  <a:srgbClr val="27D3EE"/>
+                </a:solidFill>
+                <a:latin typeface="Calibri" pitchFamily="34" charset="0"/>
+                <a:ea typeface="Calibri" pitchFamily="34" charset="-122"/>
+                <a:cs typeface="Calibri" pitchFamily="34" charset="-120"/>
+              </a:rPr>
+              <a:t>ТЕОРИЯ</a:t>
+            </a:r>
+            <a:endParaRPr lang="en-US" sz="1300" dirty="0"/>
+          </a:p>
+        </p:txBody>
+      </p:sp>
+      <p:sp>
+        <p:nvSpPr>
+          <p:cNvPr id="3" name="Text 1"/>
+          <p:cNvSpPr/>
+          <p:nvPr/>
+        </p:nvSpPr>
+        <p:spPr>
+          <a:xfrm>
+            <a:off x="594360" y="749808"/>
+            <a:ext cx="10972800" cy="868680"/>
           </a:xfrm>
           <a:prstGeom prst="rect">
             <a:avLst/>
@@ -2752,46 +2720,7 @@
               <a:buNone/>
             </a:pPr>
             <a:r>
-              <a:rPr lang="en-US" sz="1300" b="1" spc="200" kern="0" dirty="0">
-                <a:solidFill>
-                  <a:srgbClr val="27D3EE"/>
-                </a:solidFill>
-                <a:latin typeface="Calibri" pitchFamily="34" charset="0"/>
-                <a:ea typeface="Calibri" pitchFamily="34" charset="-122"/>
-                <a:cs typeface="Calibri" pitchFamily="34" charset="-120"/>
-              </a:rPr>
-              <a:t>РЕАЛЬНЫЙ КЕЙС</a:t>
-            </a:r>
-            <a:endParaRPr lang="en-US" sz="1300" dirty="0"/>
-          </a:p>
-        </p:txBody>
-      </p:sp>
-      <p:sp>
-        <p:nvSpPr>
-          <p:cNvPr id="3" name="Text 1"/>
-          <p:cNvSpPr/>
-          <p:nvPr/>
-        </p:nvSpPr>
-        <p:spPr>
-          <a:xfrm>
-            <a:off x="594360" y="749808"/>
-            <a:ext cx="11002975" cy="822960"/>
-          </a:xfrm>
-          <a:prstGeom prst="rect">
-            <a:avLst/>
-          </a:prstGeom>
-          <a:noFill/>
-          <a:ln/>
-        </p:spPr>
-        <p:txBody>
-          <a:bodyPr wrap="square" rtlCol="0" anchor="t"/>
-          <a:lstStyle/>
-          <a:p>
-            <a:pPr indent="0" marL="0">
-              <a:buNone/>
-            </a:pPr>
-            <a:r>
-              <a:rPr lang="en-US" sz="3000" b="1" dirty="0">
+              <a:rPr lang="en-US" sz="3400" b="1" dirty="0">
                 <a:solidFill>
                   <a:srgbClr val="FFFFFF"/>
                 </a:solidFill>
@@ -2799,26 +2728,65 @@
                 <a:ea typeface="Calibri" pitchFamily="34" charset="-122"/>
                 <a:cs typeface="Calibri" pitchFamily="34" charset="-120"/>
               </a:rPr>
-              <a:t>Классификация отзывов по тональности</a:t>
-            </a:r>
-            <a:endParaRPr lang="en-US" sz="3000" dirty="0"/>
-          </a:p>
-        </p:txBody>
-      </p:sp>
-      <p:sp>
-        <p:nvSpPr>
-          <p:cNvPr id="4" name="Shape 2"/>
-          <p:cNvSpPr/>
-          <p:nvPr/>
-        </p:nvSpPr>
-        <p:spPr>
-          <a:xfrm>
-            <a:off x="594360" y="2103120"/>
-            <a:ext cx="11002975" cy="1371600"/>
+              <a:t>Три приёма хорошего промпта</a:t>
+            </a:r>
+            <a:endParaRPr lang="en-US" sz="3400" dirty="0"/>
+          </a:p>
+        </p:txBody>
+      </p:sp>
+      <p:sp>
+        <p:nvSpPr>
+          <p:cNvPr id="4" name="Text 2"/>
+          <p:cNvSpPr/>
+          <p:nvPr/>
+        </p:nvSpPr>
+        <p:spPr>
+          <a:xfrm>
+            <a:off x="10241280" y="6382512"/>
+            <a:ext cx="1371600" cy="274320"/>
+          </a:xfrm>
+          <a:prstGeom prst="rect">
+            <a:avLst/>
+          </a:prstGeom>
+          <a:noFill/>
+          <a:ln/>
+        </p:spPr>
+        <p:txBody>
+          <a:bodyPr wrap="square" rtlCol="0" anchor="ctr"/>
+          <a:lstStyle/>
+          <a:p>
+            <a:pPr algn="r" indent="0" marL="0">
+              <a:buNone/>
+            </a:pPr>
+            <a:r>
+              <a:rPr lang="en-US" sz="1200" dirty="0">
+                <a:solidFill>
+                  <a:srgbClr val="9E96C8"/>
+                </a:solidFill>
+                <a:latin typeface="Calibri" pitchFamily="34" charset="0"/>
+                <a:ea typeface="Calibri" pitchFamily="34" charset="-122"/>
+                <a:cs typeface="Calibri" pitchFamily="34" charset="-120"/>
+              </a:rPr>
+              <a:t>Урок 18</a:t>
+            </a:r>
+            <a:endParaRPr lang="en-US" sz="1200" dirty="0"/>
+          </a:p>
+        </p:txBody>
+      </p:sp>
+      <p:sp>
+        <p:nvSpPr>
+          <p:cNvPr id="5" name="Shape 3"/>
+          <p:cNvSpPr/>
+          <p:nvPr/>
+        </p:nvSpPr>
+        <p:spPr>
+          <a:xfrm>
+            <a:off x="594360" y="1828800"/>
+            <a:ext cx="3429000" cy="2331720"/>
           </a:xfrm>
           <a:prstGeom prst="roundRect">
             <a:avLst>
-              <a:gd name="adj" fmla="val 8000"/>
+              <a:gd name="adj" fmla="val 4706"/>
             </a:avLst>
           </a:prstGeom>
           <a:solidFill>
@@ -2829,14 +2797,34 @@
       </p:sp>
       <p:sp>
         <p:nvSpPr>
-          <p:cNvPr id="5" name="Text 3"/>
-          <p:cNvSpPr/>
-          <p:nvPr/>
-        </p:nvSpPr>
-        <p:spPr>
-          <a:xfrm>
-            <a:off x="960120" y="2331720"/>
-            <a:ext cx="10271455" cy="914400"/>
+          <p:cNvPr id="6" name="Shape 4"/>
+          <p:cNvSpPr/>
+          <p:nvPr/>
+        </p:nvSpPr>
+        <p:spPr>
+          <a:xfrm>
+            <a:off x="1892808" y="2103120"/>
+            <a:ext cx="822960" cy="822960"/>
+          </a:xfrm>
+          <a:prstGeom prst="ellipse">
+            <a:avLst/>
+          </a:prstGeom>
+          <a:solidFill>
+            <a:srgbClr val="5B4FC4"/>
+          </a:solidFill>
+          <a:ln/>
+        </p:spPr>
+      </p:sp>
+      <p:sp>
+        <p:nvSpPr>
+          <p:cNvPr id="7" name="Text 5"/>
+          <p:cNvSpPr/>
+          <p:nvPr/>
+        </p:nvSpPr>
+        <p:spPr>
+          <a:xfrm>
+            <a:off x="1892808" y="2103120"/>
+            <a:ext cx="822960" cy="822960"/>
           </a:xfrm>
           <a:prstGeom prst="rect">
             <a:avLst/>
@@ -2848,19 +2836,58 @@
           <a:bodyPr wrap="square" rtlCol="0" anchor="ctr"/>
           <a:lstStyle/>
           <a:p>
-            <a:pPr indent="0" marL="0">
-              <a:buNone/>
-            </a:pPr>
-            <a:r>
-              <a:rPr lang="en-US" sz="1900" dirty="0">
-                <a:solidFill>
-                  <a:srgbClr val="D9D4F2"/>
-                </a:solidFill>
-                <a:latin typeface="Calibri" pitchFamily="34" charset="0"/>
-                <a:ea typeface="Calibri" pitchFamily="34" charset="-122"/>
-                <a:cs typeface="Calibri" pitchFamily="34" charset="-120"/>
-              </a:rPr>
-              <a:t>«Отличный сервис!» → позитив     «Ужасно, долго» → негатив</a:t>
+            <a:pPr algn="ctr" indent="0" marL="0">
+              <a:buNone/>
+            </a:pPr>
+            <a:r>
+              <a:rPr lang="en-US" sz="2600" b="1" dirty="0">
+                <a:solidFill>
+                  <a:srgbClr val="FFFFFF"/>
+                </a:solidFill>
+                <a:latin typeface="Calibri" pitchFamily="34" charset="0"/>
+                <a:ea typeface="Calibri" pitchFamily="34" charset="-122"/>
+                <a:cs typeface="Calibri" pitchFamily="34" charset="-120"/>
+              </a:rPr>
+              <a:t>1</a:t>
+            </a:r>
+            <a:endParaRPr lang="en-US" sz="2600" dirty="0"/>
+          </a:p>
+        </p:txBody>
+      </p:sp>
+      <p:sp>
+        <p:nvSpPr>
+          <p:cNvPr id="8" name="Text 6"/>
+          <p:cNvSpPr/>
+          <p:nvPr/>
+        </p:nvSpPr>
+        <p:spPr>
+          <a:xfrm>
+            <a:off x="594360" y="3063240"/>
+            <a:ext cx="3429000" cy="457200"/>
+          </a:xfrm>
+          <a:prstGeom prst="rect">
+            <a:avLst/>
+          </a:prstGeom>
+          <a:noFill/>
+          <a:ln/>
+        </p:spPr>
+        <p:txBody>
+          <a:bodyPr wrap="square" rtlCol="0" anchor="ctr"/>
+          <a:lstStyle/>
+          <a:p>
+            <a:pPr algn="ctr" indent="0" marL="0">
+              <a:buNone/>
+            </a:pPr>
+            <a:r>
+              <a:rPr lang="en-US" sz="1900" b="1" dirty="0">
+                <a:solidFill>
+                  <a:srgbClr val="FFFFFF"/>
+                </a:solidFill>
+                <a:latin typeface="Calibri" pitchFamily="34" charset="0"/>
+                <a:ea typeface="Calibri" pitchFamily="34" charset="-122"/>
+                <a:cs typeface="Calibri" pitchFamily="34" charset="-120"/>
+              </a:rPr>
+              <a:t>Роль</a:t>
             </a:r>
             <a:endParaRPr lang="en-US" sz="1900" dirty="0"/>
           </a:p>
@@ -2868,18 +2895,428 @@
       </p:sp>
       <p:sp>
         <p:nvSpPr>
-          <p:cNvPr id="6" name="Shape 4"/>
-          <p:cNvSpPr/>
-          <p:nvPr/>
-        </p:nvSpPr>
-        <p:spPr>
-          <a:xfrm>
-            <a:off x="594360" y="3657600"/>
-            <a:ext cx="11002975" cy="2103120"/>
+          <p:cNvPr id="9" name="Text 7"/>
+          <p:cNvSpPr/>
+          <p:nvPr/>
+        </p:nvSpPr>
+        <p:spPr>
+          <a:xfrm>
+            <a:off x="822960" y="3520440"/>
+            <a:ext cx="2971800" cy="548640"/>
+          </a:xfrm>
+          <a:prstGeom prst="rect">
+            <a:avLst/>
+          </a:prstGeom>
+          <a:noFill/>
+          <a:ln/>
+        </p:spPr>
+        <p:txBody>
+          <a:bodyPr wrap="square" rtlCol="0" anchor="ctr"/>
+          <a:lstStyle/>
+          <a:p>
+            <a:pPr algn="ctr" indent="0" marL="0">
+              <a:buNone/>
+            </a:pPr>
+            <a:r>
+              <a:rPr lang="en-US" sz="1400" dirty="0">
+                <a:solidFill>
+                  <a:srgbClr val="9E96C8"/>
+                </a:solidFill>
+                <a:latin typeface="Calibri" pitchFamily="34" charset="0"/>
+                <a:ea typeface="Calibri" pitchFamily="34" charset="-122"/>
+                <a:cs typeface="Calibri" pitchFamily="34" charset="-120"/>
+              </a:rPr>
+              <a:t>«Ты — опытный …» — задаёт тон и уровень</a:t>
+            </a:r>
+            <a:endParaRPr lang="en-US" sz="1400" dirty="0"/>
+          </a:p>
+        </p:txBody>
+      </p:sp>
+      <p:sp>
+        <p:nvSpPr>
+          <p:cNvPr id="10" name="Shape 8"/>
+          <p:cNvSpPr/>
+          <p:nvPr/>
+        </p:nvSpPr>
+        <p:spPr>
+          <a:xfrm>
+            <a:off x="4306824" y="1828800"/>
+            <a:ext cx="3429000" cy="2331720"/>
           </a:xfrm>
           <a:prstGeom prst="roundRect">
             <a:avLst>
-              <a:gd name="adj" fmla="val 5217"/>
+              <a:gd name="adj" fmla="val 4706"/>
+            </a:avLst>
+          </a:prstGeom>
+          <a:solidFill>
+            <a:srgbClr val="241E42"/>
+          </a:solidFill>
+          <a:ln/>
+        </p:spPr>
+      </p:sp>
+      <p:sp>
+        <p:nvSpPr>
+          <p:cNvPr id="11" name="Shape 9"/>
+          <p:cNvSpPr/>
+          <p:nvPr/>
+        </p:nvSpPr>
+        <p:spPr>
+          <a:xfrm>
+            <a:off x="5605272" y="2103120"/>
+            <a:ext cx="822960" cy="822960"/>
+          </a:xfrm>
+          <a:prstGeom prst="ellipse">
+            <a:avLst/>
+          </a:prstGeom>
+          <a:solidFill>
+            <a:srgbClr val="27D3EE"/>
+          </a:solidFill>
+          <a:ln/>
+        </p:spPr>
+      </p:sp>
+      <p:sp>
+        <p:nvSpPr>
+          <p:cNvPr id="12" name="Text 10"/>
+          <p:cNvSpPr/>
+          <p:nvPr/>
+        </p:nvSpPr>
+        <p:spPr>
+          <a:xfrm>
+            <a:off x="5605272" y="2103120"/>
+            <a:ext cx="822960" cy="822960"/>
+          </a:xfrm>
+          <a:prstGeom prst="rect">
+            <a:avLst/>
+          </a:prstGeom>
+          <a:noFill/>
+          <a:ln/>
+        </p:spPr>
+        <p:txBody>
+          <a:bodyPr wrap="square" rtlCol="0" anchor="ctr"/>
+          <a:lstStyle/>
+          <a:p>
+            <a:pPr algn="ctr" indent="0" marL="0">
+              <a:buNone/>
+            </a:pPr>
+            <a:r>
+              <a:rPr lang="en-US" sz="2600" b="1" dirty="0">
+                <a:solidFill>
+                  <a:srgbClr val="17132E"/>
+                </a:solidFill>
+                <a:latin typeface="Calibri" pitchFamily="34" charset="0"/>
+                <a:ea typeface="Calibri" pitchFamily="34" charset="-122"/>
+                <a:cs typeface="Calibri" pitchFamily="34" charset="-120"/>
+              </a:rPr>
+              <a:t>2</a:t>
+            </a:r>
+            <a:endParaRPr lang="en-US" sz="2600" dirty="0"/>
+          </a:p>
+        </p:txBody>
+      </p:sp>
+      <p:sp>
+        <p:nvSpPr>
+          <p:cNvPr id="13" name="Text 11"/>
+          <p:cNvSpPr/>
+          <p:nvPr/>
+        </p:nvSpPr>
+        <p:spPr>
+          <a:xfrm>
+            <a:off x="4306824" y="3063240"/>
+            <a:ext cx="3429000" cy="457200"/>
+          </a:xfrm>
+          <a:prstGeom prst="rect">
+            <a:avLst/>
+          </a:prstGeom>
+          <a:noFill/>
+          <a:ln/>
+        </p:spPr>
+        <p:txBody>
+          <a:bodyPr wrap="square" rtlCol="0" anchor="ctr"/>
+          <a:lstStyle/>
+          <a:p>
+            <a:pPr algn="ctr" indent="0" marL="0">
+              <a:buNone/>
+            </a:pPr>
+            <a:r>
+              <a:rPr lang="en-US" sz="1900" b="1" dirty="0">
+                <a:solidFill>
+                  <a:srgbClr val="27D3EE"/>
+                </a:solidFill>
+                <a:latin typeface="Calibri" pitchFamily="34" charset="0"/>
+                <a:ea typeface="Calibri" pitchFamily="34" charset="-122"/>
+                <a:cs typeface="Calibri" pitchFamily="34" charset="-120"/>
+              </a:rPr>
+              <a:t>Примеры</a:t>
+            </a:r>
+            <a:endParaRPr lang="en-US" sz="1900" dirty="0"/>
+          </a:p>
+        </p:txBody>
+      </p:sp>
+      <p:sp>
+        <p:nvSpPr>
+          <p:cNvPr id="14" name="Text 12"/>
+          <p:cNvSpPr/>
+          <p:nvPr/>
+        </p:nvSpPr>
+        <p:spPr>
+          <a:xfrm>
+            <a:off x="4535424" y="3520440"/>
+            <a:ext cx="2971800" cy="548640"/>
+          </a:xfrm>
+          <a:prstGeom prst="rect">
+            <a:avLst/>
+          </a:prstGeom>
+          <a:noFill/>
+          <a:ln/>
+        </p:spPr>
+        <p:txBody>
+          <a:bodyPr wrap="square" rtlCol="0" anchor="ctr"/>
+          <a:lstStyle/>
+          <a:p>
+            <a:pPr algn="ctr" indent="0" marL="0">
+              <a:buNone/>
+            </a:pPr>
+            <a:r>
+              <a:rPr lang="en-US" sz="1400" dirty="0">
+                <a:solidFill>
+                  <a:srgbClr val="9E96C8"/>
+                </a:solidFill>
+                <a:latin typeface="Calibri" pitchFamily="34" charset="0"/>
+                <a:ea typeface="Calibri" pitchFamily="34" charset="-122"/>
+                <a:cs typeface="Calibri" pitchFamily="34" charset="-120"/>
+              </a:rPr>
+              <a:t>2–3 «вход → ответ» — модель ловит формат</a:t>
+            </a:r>
+            <a:endParaRPr lang="en-US" sz="1400" dirty="0"/>
+          </a:p>
+        </p:txBody>
+      </p:sp>
+      <p:sp>
+        <p:nvSpPr>
+          <p:cNvPr id="15" name="Shape 13"/>
+          <p:cNvSpPr/>
+          <p:nvPr/>
+        </p:nvSpPr>
+        <p:spPr>
+          <a:xfrm>
+            <a:off x="8019288" y="1828800"/>
+            <a:ext cx="3429000" cy="2331720"/>
+          </a:xfrm>
+          <a:prstGeom prst="roundRect">
+            <a:avLst>
+              <a:gd name="adj" fmla="val 4706"/>
+            </a:avLst>
+          </a:prstGeom>
+          <a:solidFill>
+            <a:srgbClr val="241E42"/>
+          </a:solidFill>
+          <a:ln/>
+        </p:spPr>
+      </p:sp>
+      <p:sp>
+        <p:nvSpPr>
+          <p:cNvPr id="16" name="Shape 14"/>
+          <p:cNvSpPr/>
+          <p:nvPr/>
+        </p:nvSpPr>
+        <p:spPr>
+          <a:xfrm>
+            <a:off x="9317736" y="2103120"/>
+            <a:ext cx="822960" cy="822960"/>
+          </a:xfrm>
+          <a:prstGeom prst="ellipse">
+            <a:avLst/>
+          </a:prstGeom>
+          <a:solidFill>
+            <a:srgbClr val="8B7DF5"/>
+          </a:solidFill>
+          <a:ln/>
+        </p:spPr>
+      </p:sp>
+      <p:sp>
+        <p:nvSpPr>
+          <p:cNvPr id="17" name="Text 15"/>
+          <p:cNvSpPr/>
+          <p:nvPr/>
+        </p:nvSpPr>
+        <p:spPr>
+          <a:xfrm>
+            <a:off x="9317736" y="2103120"/>
+            <a:ext cx="822960" cy="822960"/>
+          </a:xfrm>
+          <a:prstGeom prst="rect">
+            <a:avLst/>
+          </a:prstGeom>
+          <a:noFill/>
+          <a:ln/>
+        </p:spPr>
+        <p:txBody>
+          <a:bodyPr wrap="square" rtlCol="0" anchor="ctr"/>
+          <a:lstStyle/>
+          <a:p>
+            <a:pPr algn="ctr" indent="0" marL="0">
+              <a:buNone/>
+            </a:pPr>
+            <a:r>
+              <a:rPr lang="en-US" sz="2600" b="1" dirty="0">
+                <a:solidFill>
+                  <a:srgbClr val="FFFFFF"/>
+                </a:solidFill>
+                <a:latin typeface="Calibri" pitchFamily="34" charset="0"/>
+                <a:ea typeface="Calibri" pitchFamily="34" charset="-122"/>
+                <a:cs typeface="Calibri" pitchFamily="34" charset="-120"/>
+              </a:rPr>
+              <a:t>3</a:t>
+            </a:r>
+            <a:endParaRPr lang="en-US" sz="2600" dirty="0"/>
+          </a:p>
+        </p:txBody>
+      </p:sp>
+      <p:sp>
+        <p:nvSpPr>
+          <p:cNvPr id="18" name="Text 16"/>
+          <p:cNvSpPr/>
+          <p:nvPr/>
+        </p:nvSpPr>
+        <p:spPr>
+          <a:xfrm>
+            <a:off x="8019288" y="3063240"/>
+            <a:ext cx="3429000" cy="457200"/>
+          </a:xfrm>
+          <a:prstGeom prst="rect">
+            <a:avLst/>
+          </a:prstGeom>
+          <a:noFill/>
+          <a:ln/>
+        </p:spPr>
+        <p:txBody>
+          <a:bodyPr wrap="square" rtlCol="0" anchor="ctr"/>
+          <a:lstStyle/>
+          <a:p>
+            <a:pPr algn="ctr" indent="0" marL="0">
+              <a:buNone/>
+            </a:pPr>
+            <a:r>
+              <a:rPr lang="en-US" sz="1900" b="1" dirty="0">
+                <a:solidFill>
+                  <a:srgbClr val="FFFFFF"/>
+                </a:solidFill>
+                <a:latin typeface="Calibri" pitchFamily="34" charset="0"/>
+                <a:ea typeface="Calibri" pitchFamily="34" charset="-122"/>
+                <a:cs typeface="Calibri" pitchFamily="34" charset="-120"/>
+              </a:rPr>
+              <a:t>Формат</a:t>
+            </a:r>
+            <a:endParaRPr lang="en-US" sz="1900" dirty="0"/>
+          </a:p>
+        </p:txBody>
+      </p:sp>
+      <p:sp>
+        <p:nvSpPr>
+          <p:cNvPr id="19" name="Text 17"/>
+          <p:cNvSpPr/>
+          <p:nvPr/>
+        </p:nvSpPr>
+        <p:spPr>
+          <a:xfrm>
+            <a:off x="8247888" y="3520440"/>
+            <a:ext cx="2971800" cy="548640"/>
+          </a:xfrm>
+          <a:prstGeom prst="rect">
+            <a:avLst/>
+          </a:prstGeom>
+          <a:noFill/>
+          <a:ln/>
+        </p:spPr>
+        <p:txBody>
+          <a:bodyPr wrap="square" rtlCol="0" anchor="ctr"/>
+          <a:lstStyle/>
+          <a:p>
+            <a:pPr algn="ctr" indent="0" marL="0">
+              <a:buNone/>
+            </a:pPr>
+            <a:r>
+              <a:rPr lang="en-US" sz="1400" dirty="0">
+                <a:solidFill>
+                  <a:srgbClr val="9E96C8"/>
+                </a:solidFill>
+                <a:latin typeface="Calibri" pitchFamily="34" charset="0"/>
+                <a:ea typeface="Calibri" pitchFamily="34" charset="-122"/>
+                <a:cs typeface="Calibri" pitchFamily="34" charset="-120"/>
+              </a:rPr>
+              <a:t>«ответь одним словом» — модель не растекается</a:t>
+            </a:r>
+            <a:endParaRPr lang="en-US" sz="1400" dirty="0"/>
+          </a:p>
+        </p:txBody>
+      </p:sp>
+      <p:sp>
+        <p:nvSpPr>
+          <p:cNvPr id="20" name="Text 18"/>
+          <p:cNvSpPr/>
+          <p:nvPr/>
+        </p:nvSpPr>
+        <p:spPr>
+          <a:xfrm>
+            <a:off x="594360" y="4343400"/>
+            <a:ext cx="11000232" cy="365760"/>
+          </a:xfrm>
+          <a:prstGeom prst="rect">
+            <a:avLst/>
+          </a:prstGeom>
+          <a:noFill/>
+          <a:ln/>
+        </p:spPr>
+        <p:txBody>
+          <a:bodyPr wrap="square" rtlCol="0" anchor="t"/>
+          <a:lstStyle/>
+          <a:p>
+            <a:pPr indent="0" marL="0">
+              <a:buNone/>
+            </a:pPr>
+            <a:r>
+              <a:rPr lang="en-US" sz="1400" b="1" dirty="0">
+                <a:solidFill>
+                  <a:srgbClr val="2DD4BF"/>
+                </a:solidFill>
+                <a:latin typeface="Calibri" pitchFamily="34" charset="0"/>
+                <a:ea typeface="Calibri" pitchFamily="34" charset="-122"/>
+                <a:cs typeface="Calibri" pitchFamily="34" charset="-120"/>
+              </a:rPr>
+              <a:t>Бонус: </a:t>
+            </a:r>
+            <a:pPr indent="0" marL="0">
+              <a:buNone/>
+            </a:pPr>
+            <a:r>
+              <a:rPr lang="en-US" sz="1400" dirty="0">
+                <a:solidFill>
+                  <a:srgbClr val="9E96C8"/>
+                </a:solidFill>
+                <a:latin typeface="Calibri" pitchFamily="34" charset="0"/>
+                <a:ea typeface="Calibri" pitchFamily="34" charset="-122"/>
+                <a:cs typeface="Calibri" pitchFamily="34" charset="-120"/>
+              </a:rPr>
+              <a:t>«рассуждай по шагам» (цепочка мыслей) — точнее на сложных задачах.</a:t>
+            </a:r>
+            <a:endParaRPr lang="en-US" sz="1400" dirty="0"/>
+          </a:p>
+        </p:txBody>
+      </p:sp>
+      <p:sp>
+        <p:nvSpPr>
+          <p:cNvPr id="21" name="Shape 19"/>
+          <p:cNvSpPr/>
+          <p:nvPr/>
+        </p:nvSpPr>
+        <p:spPr>
+          <a:xfrm>
+            <a:off x="594360" y="4892040"/>
+            <a:ext cx="11000232" cy="777240"/>
+          </a:xfrm>
+          <a:prstGeom prst="roundRect">
+            <a:avLst>
+              <a:gd name="adj" fmla="val 14118"/>
             </a:avLst>
           </a:prstGeom>
           <a:solidFill>
@@ -2890,69 +3327,44 @@
       </p:sp>
       <p:sp>
         <p:nvSpPr>
-          <p:cNvPr id="7" name="Text 5"/>
-          <p:cNvSpPr/>
-          <p:nvPr/>
-        </p:nvSpPr>
-        <p:spPr>
-          <a:xfrm>
-            <a:off x="960120" y="3886200"/>
-            <a:ext cx="7315200" cy="457200"/>
-          </a:xfrm>
-          <a:prstGeom prst="rect">
-            <a:avLst/>
-          </a:prstGeom>
-          <a:noFill/>
-          <a:ln/>
-        </p:spPr>
-        <p:txBody>
-          <a:bodyPr wrap="square" rtlCol="0" anchor="t"/>
-          <a:lstStyle/>
-          <a:p>
-            <a:pPr indent="0" marL="0">
-              <a:buNone/>
-            </a:pPr>
-            <a:r>
-              <a:rPr lang="en-US" sz="1800" b="1" dirty="0">
-                <a:solidFill>
-                  <a:srgbClr val="FF7A8A"/>
-                </a:solidFill>
-                <a:latin typeface="Calibri" pitchFamily="34" charset="0"/>
-                <a:ea typeface="Calibri" pitchFamily="34" charset="-122"/>
-                <a:cs typeface="Calibri" pitchFamily="34" charset="-120"/>
-              </a:rPr>
-              <a:t>Ловушка: сарказм и отрицание</a:t>
-            </a:r>
-            <a:endParaRPr lang="en-US" sz="1800" dirty="0"/>
-          </a:p>
-        </p:txBody>
-      </p:sp>
-      <p:sp>
-        <p:nvSpPr>
-          <p:cNvPr id="8" name="Text 6"/>
-          <p:cNvSpPr/>
-          <p:nvPr/>
-        </p:nvSpPr>
-        <p:spPr>
-          <a:xfrm>
-            <a:off x="960120" y="4434840"/>
-            <a:ext cx="10271455" cy="548640"/>
-          </a:xfrm>
-          <a:prstGeom prst="rect">
-            <a:avLst/>
-          </a:prstGeom>
-          <a:noFill/>
-          <a:ln/>
-        </p:spPr>
-        <p:txBody>
-          <a:bodyPr wrap="square" rtlCol="0" anchor="t"/>
-          <a:lstStyle/>
-          <a:p>
-            <a:pPr indent="0" marL="0">
-              <a:buNone/>
-            </a:pPr>
-            <a:r>
-              <a:rPr lang="en-US" sz="1800" i="1" dirty="0">
+          <p:cNvPr id="22" name="Text 20"/>
+          <p:cNvSpPr/>
+          <p:nvPr/>
+        </p:nvSpPr>
+        <p:spPr>
+          <a:xfrm>
+            <a:off x="868680" y="4892040"/>
+            <a:ext cx="10424160" cy="777240"/>
+          </a:xfrm>
+          <a:prstGeom prst="rect">
+            <a:avLst/>
+          </a:prstGeom>
+          <a:noFill/>
+          <a:ln/>
+        </p:spPr>
+        <p:txBody>
+          <a:bodyPr wrap="square" rtlCol="0" anchor="ctr"/>
+          <a:lstStyle/>
+          <a:p>
+            <a:pPr indent="0" marL="0">
+              <a:buNone/>
+            </a:pPr>
+            <a:r>
+              <a:rPr lang="en-US" sz="1500" b="1" dirty="0">
+                <a:solidFill>
+                  <a:srgbClr val="27D3EE"/>
+                </a:solidFill>
+                <a:latin typeface="Calibri" pitchFamily="34" charset="0"/>
+                <a:ea typeface="Calibri" pitchFamily="34" charset="-122"/>
+                <a:cs typeface="Calibri" pitchFamily="34" charset="-120"/>
+              </a:rPr>
+              <a:t>ПОПРОБУЙ САМ (2 мин):  </a:t>
+            </a:r>
+            <a:pPr indent="0" marL="0">
+              <a:buNone/>
+            </a:pPr>
+            <a:r>
+              <a:rPr lang="en-US" sz="1500" dirty="0">
                 <a:solidFill>
                   <a:srgbClr val="D9D4F2"/>
                 </a:solidFill>
@@ -2960,90 +3372,9 @@
                 <a:ea typeface="Calibri" pitchFamily="34" charset="-122"/>
                 <a:cs typeface="Calibri" pitchFamily="34" charset="-120"/>
               </a:rPr>
-              <a:t>«Ну очень „порадовал“ этот сервис…»   ·   «не плохо»</a:t>
-            </a:r>
-            <a:endParaRPr lang="en-US" sz="1800" dirty="0"/>
-          </a:p>
-        </p:txBody>
-      </p:sp>
-      <p:sp>
-        <p:nvSpPr>
-          <p:cNvPr id="9" name="Text 7"/>
-          <p:cNvSpPr/>
-          <p:nvPr/>
-        </p:nvSpPr>
-        <p:spPr>
-          <a:xfrm>
-            <a:off x="960120" y="5029200"/>
-            <a:ext cx="10271455" cy="640080"/>
-          </a:xfrm>
-          <a:prstGeom prst="rect">
-            <a:avLst/>
-          </a:prstGeom>
-          <a:noFill/>
-          <a:ln/>
-        </p:spPr>
-        <p:txBody>
-          <a:bodyPr wrap="square" rtlCol="0" anchor="t"/>
-          <a:lstStyle/>
-          <a:p>
-            <a:pPr indent="0" marL="0">
-              <a:lnSpc>
-                <a:spcPct val="110000"/>
-              </a:lnSpc>
-              <a:buNone/>
-            </a:pPr>
-            <a:r>
-              <a:rPr lang="en-US" sz="1500" dirty="0">
-                <a:solidFill>
-                  <a:srgbClr val="9E96C8"/>
-                </a:solidFill>
-                <a:latin typeface="Calibri" pitchFamily="34" charset="0"/>
-                <a:ea typeface="Calibri" pitchFamily="34" charset="-122"/>
-                <a:cs typeface="Calibri" pitchFamily="34" charset="-120"/>
-              </a:rPr>
-              <a:t>Классификатор по словам ошибётся. Ответ модели всегда проверяем — она уверенно ошибается и бывает предвзятой.</a:t>
+              <a:t>возьми свой вопрос, добавь роль + формат и сравни ответ «до» и «после».</a:t>
             </a:r>
             <a:endParaRPr lang="en-US" sz="1500" dirty="0"/>
-          </a:p>
-        </p:txBody>
-      </p:sp>
-      <p:sp>
-        <p:nvSpPr>
-          <p:cNvPr id="10" name="Text 8"/>
-          <p:cNvSpPr/>
-          <p:nvPr/>
-        </p:nvSpPr>
-        <p:spPr>
-          <a:xfrm>
-            <a:off x="10271455" y="6355080"/>
-            <a:ext cx="1371600" cy="274320"/>
-          </a:xfrm>
-          <a:prstGeom prst="rect">
-            <a:avLst/>
-          </a:prstGeom>
-          <a:noFill/>
-          <a:ln/>
-        </p:spPr>
-        <p:txBody>
-          <a:bodyPr wrap="square" rtlCol="0" anchor="t"/>
-          <a:lstStyle/>
-          <a:p>
-            <a:pPr algn="r" indent="0" marL="0">
-              <a:buNone/>
-            </a:pPr>
-            <a:r>
-              <a:rPr lang="en-US" sz="1100" dirty="0">
-                <a:solidFill>
-                  <a:srgbClr val="9E96C8"/>
-                </a:solidFill>
-                <a:latin typeface="Calibri" pitchFamily="34" charset="0"/>
-                <a:ea typeface="Calibri" pitchFamily="34" charset="-122"/>
-                <a:cs typeface="Calibri" pitchFamily="34" charset="-120"/>
-              </a:rPr>
-              <a:t>Урок 18</a:t>
-            </a:r>
-            <a:endParaRPr lang="en-US" sz="1100" dirty="0"/>
           </a:p>
         </p:txBody>
       </p:sp>
@@ -3088,7 +3419,46 @@
         <p:spPr>
           <a:xfrm>
             <a:off x="594360" y="457200"/>
-            <a:ext cx="11002975" cy="320040"/>
+            <a:ext cx="10972800" cy="320040"/>
+          </a:xfrm>
+          <a:prstGeom prst="rect">
+            <a:avLst/>
+          </a:prstGeom>
+          <a:noFill/>
+          <a:ln/>
+        </p:spPr>
+        <p:txBody>
+          <a:bodyPr wrap="square" rtlCol="0" anchor="ctr"/>
+          <a:lstStyle/>
+          <a:p>
+            <a:pPr indent="0" marL="0">
+              <a:buNone/>
+            </a:pPr>
+            <a:r>
+              <a:rPr lang="en-US" sz="1300" b="1" spc="200" kern="0" dirty="0">
+                <a:solidFill>
+                  <a:srgbClr val="27D3EE"/>
+                </a:solidFill>
+                <a:latin typeface="Calibri" pitchFamily="34" charset="0"/>
+                <a:ea typeface="Calibri" pitchFamily="34" charset="-122"/>
+                <a:cs typeface="Calibri" pitchFamily="34" charset="-120"/>
+              </a:rPr>
+              <a:t>ХАРАКТЕР БОТА</a:t>
+            </a:r>
+            <a:endParaRPr lang="en-US" sz="1300" dirty="0"/>
+          </a:p>
+        </p:txBody>
+      </p:sp>
+      <p:sp>
+        <p:nvSpPr>
+          <p:cNvPr id="3" name="Text 1"/>
+          <p:cNvSpPr/>
+          <p:nvPr/>
+        </p:nvSpPr>
+        <p:spPr>
+          <a:xfrm>
+            <a:off x="594360" y="749808"/>
+            <a:ext cx="10972800" cy="868680"/>
           </a:xfrm>
           <a:prstGeom prst="rect">
             <a:avLst/>
@@ -3104,46 +3474,7 @@
               <a:buNone/>
             </a:pPr>
             <a:r>
-              <a:rPr lang="en-US" sz="1300" b="1" spc="200" kern="0" dirty="0">
-                <a:solidFill>
-                  <a:srgbClr val="27D3EE"/>
-                </a:solidFill>
-                <a:latin typeface="Calibri" pitchFamily="34" charset="0"/>
-                <a:ea typeface="Calibri" pitchFamily="34" charset="-122"/>
-                <a:cs typeface="Calibri" pitchFamily="34" charset="-120"/>
-              </a:rPr>
-              <a:t>ИТОГ · ФИНАЛ ФАЗЫ 4</a:t>
-            </a:r>
-            <a:endParaRPr lang="en-US" sz="1300" dirty="0"/>
-          </a:p>
-        </p:txBody>
-      </p:sp>
-      <p:sp>
-        <p:nvSpPr>
-          <p:cNvPr id="3" name="Text 1"/>
-          <p:cNvSpPr/>
-          <p:nvPr/>
-        </p:nvSpPr>
-        <p:spPr>
-          <a:xfrm>
-            <a:off x="594360" y="749808"/>
-            <a:ext cx="11002975" cy="822960"/>
-          </a:xfrm>
-          <a:prstGeom prst="rect">
-            <a:avLst/>
-          </a:prstGeom>
-          <a:noFill/>
-          <a:ln/>
-        </p:spPr>
-        <p:txBody>
-          <a:bodyPr wrap="square" rtlCol="0" anchor="t"/>
-          <a:lstStyle/>
-          <a:p>
-            <a:pPr indent="0" marL="0">
-              <a:buNone/>
-            </a:pPr>
-            <a:r>
-              <a:rPr lang="en-US" sz="3000" b="1" dirty="0">
+              <a:rPr lang="en-US" sz="3400" b="1" dirty="0">
                 <a:solidFill>
                   <a:srgbClr val="FFFFFF"/>
                 </a:solidFill>
@@ -3151,26 +3482,65 @@
                 <a:ea typeface="Calibri" pitchFamily="34" charset="-122"/>
                 <a:cs typeface="Calibri" pitchFamily="34" charset="-120"/>
               </a:rPr>
-              <a:t>Что унесём с урока</a:t>
-            </a:r>
-            <a:endParaRPr lang="en-US" sz="3000" dirty="0"/>
-          </a:p>
-        </p:txBody>
-      </p:sp>
-      <p:sp>
-        <p:nvSpPr>
-          <p:cNvPr id="4" name="Shape 2"/>
+              <a:t>Системный промпт задаёт личность</a:t>
+            </a:r>
+            <a:endParaRPr lang="en-US" sz="3400" dirty="0"/>
+          </a:p>
+        </p:txBody>
+      </p:sp>
+      <p:sp>
+        <p:nvSpPr>
+          <p:cNvPr id="4" name="Text 2"/>
+          <p:cNvSpPr/>
+          <p:nvPr/>
+        </p:nvSpPr>
+        <p:spPr>
+          <a:xfrm>
+            <a:off x="10241280" y="6382512"/>
+            <a:ext cx="1371600" cy="274320"/>
+          </a:xfrm>
+          <a:prstGeom prst="rect">
+            <a:avLst/>
+          </a:prstGeom>
+          <a:noFill/>
+          <a:ln/>
+        </p:spPr>
+        <p:txBody>
+          <a:bodyPr wrap="square" rtlCol="0" anchor="ctr"/>
+          <a:lstStyle/>
+          <a:p>
+            <a:pPr algn="r" indent="0" marL="0">
+              <a:buNone/>
+            </a:pPr>
+            <a:r>
+              <a:rPr lang="en-US" sz="1200" dirty="0">
+                <a:solidFill>
+                  <a:srgbClr val="9E96C8"/>
+                </a:solidFill>
+                <a:latin typeface="Calibri" pitchFamily="34" charset="0"/>
+                <a:ea typeface="Calibri" pitchFamily="34" charset="-122"/>
+                <a:cs typeface="Calibri" pitchFamily="34" charset="-120"/>
+              </a:rPr>
+              <a:t>Урок 18</a:t>
+            </a:r>
+            <a:endParaRPr lang="en-US" sz="1200" dirty="0"/>
+          </a:p>
+        </p:txBody>
+      </p:sp>
+      <p:sp>
+        <p:nvSpPr>
+          <p:cNvPr id="5" name="Shape 3"/>
           <p:cNvSpPr/>
           <p:nvPr/>
         </p:nvSpPr>
         <p:spPr>
           <a:xfrm>
             <a:off x="594360" y="1920240"/>
-            <a:ext cx="5577840" cy="4023360"/>
+            <a:ext cx="11000232" cy="960120"/>
           </a:xfrm>
           <a:prstGeom prst="roundRect">
             <a:avLst>
-              <a:gd name="adj" fmla="val 2727"/>
+              <a:gd name="adj" fmla="val 11429"/>
             </a:avLst>
           </a:prstGeom>
           <a:solidFill>
@@ -3181,73 +3551,44 @@
       </p:sp>
       <p:sp>
         <p:nvSpPr>
-          <p:cNvPr id="5" name="Text 3"/>
-          <p:cNvSpPr/>
-          <p:nvPr/>
-        </p:nvSpPr>
-        <p:spPr>
-          <a:xfrm>
-            <a:off x="960120" y="2148840"/>
-            <a:ext cx="4572000" cy="457200"/>
-          </a:xfrm>
-          <a:prstGeom prst="rect">
-            <a:avLst/>
-          </a:prstGeom>
-          <a:noFill/>
-          <a:ln/>
-        </p:spPr>
-        <p:txBody>
-          <a:bodyPr wrap="square" rtlCol="0" anchor="t"/>
-          <a:lstStyle/>
-          <a:p>
-            <a:pPr indent="0" marL="0">
-              <a:buNone/>
-            </a:pPr>
-            <a:r>
-              <a:rPr lang="en-US" sz="2000" b="1" dirty="0">
-                <a:solidFill>
-                  <a:srgbClr val="27D3EE"/>
-                </a:solidFill>
-                <a:latin typeface="Calibri" pitchFamily="34" charset="0"/>
-                <a:ea typeface="Calibri" pitchFamily="34" charset="-122"/>
-                <a:cs typeface="Calibri" pitchFamily="34" charset="-120"/>
-              </a:rPr>
-              <a:t>Главное</a:t>
-            </a:r>
-            <a:endParaRPr lang="en-US" sz="2000" dirty="0"/>
-          </a:p>
-        </p:txBody>
-      </p:sp>
-      <p:sp>
-        <p:nvSpPr>
           <p:cNvPr id="6" name="Text 4"/>
           <p:cNvSpPr/>
           <p:nvPr/>
         </p:nvSpPr>
         <p:spPr>
           <a:xfrm>
-            <a:off x="1005840" y="2743200"/>
-            <a:ext cx="4937760" cy="2926080"/>
-          </a:xfrm>
-          <a:prstGeom prst="rect">
-            <a:avLst/>
-          </a:prstGeom>
-          <a:noFill/>
-          <a:ln/>
-        </p:spPr>
-        <p:txBody>
-          <a:bodyPr wrap="square" rtlCol="0" anchor="t"/>
-          <a:lstStyle/>
-          <a:p>
-            <a:pPr marL="342900" indent="-342900">
-              <a:lnSpc>
-                <a:spcPct val="130000"/>
-              </a:lnSpc>
-              <a:buSzPct val="100000"/>
-              <a:buChar char="•"/>
-            </a:pPr>
-            <a:r>
-              <a:rPr lang="en-US" sz="1600" dirty="0">
+            <a:off x="868680" y="1920240"/>
+            <a:ext cx="10424160" cy="960120"/>
+          </a:xfrm>
+          <a:prstGeom prst="rect">
+            <a:avLst/>
+          </a:prstGeom>
+          <a:noFill/>
+          <a:ln/>
+        </p:spPr>
+        <p:txBody>
+          <a:bodyPr wrap="square" rtlCol="0" anchor="ctr"/>
+          <a:lstStyle/>
+          <a:p>
+            <a:pPr indent="0" marL="0">
+              <a:buNone/>
+            </a:pPr>
+            <a:r>
+              <a:rPr lang="en-US" sz="1700" b="1" dirty="0">
+                <a:solidFill>
+                  <a:srgbClr val="8B7DF5"/>
+                </a:solidFill>
+                <a:latin typeface="Calibri" pitchFamily="34" charset="0"/>
+                <a:ea typeface="Calibri" pitchFamily="34" charset="-122"/>
+                <a:cs typeface="Calibri" pitchFamily="34" charset="-120"/>
+              </a:rPr>
+              <a:t>Системный промпт</a:t>
+            </a:r>
+            <a:pPr indent="0" marL="0">
+              <a:buNone/>
+            </a:pPr>
+            <a:r>
+              <a:rPr lang="en-US" sz="1700" dirty="0">
                 <a:solidFill>
                   <a:srgbClr val="D9D4F2"/>
                 </a:solidFill>
@@ -3255,75 +3596,9 @@
                 <a:ea typeface="Calibri" pitchFamily="34" charset="-122"/>
                 <a:cs typeface="Calibri" pitchFamily="34" charset="-120"/>
               </a:rPr>
-              <a:t>Роль + примеры + шаги = хороший промпт
-</a:t>
-            </a:r>
-            <a:endParaRPr lang="en-US" sz="1600" dirty="0"/>
-          </a:p>
-          <a:p>
-            <a:pPr marL="342900" indent="-342900">
-              <a:lnSpc>
-                <a:spcPct val="130000"/>
-              </a:lnSpc>
-              <a:buSzPct val="100000"/>
-              <a:buChar char="•"/>
-            </a:pPr>
-            <a:r>
-              <a:rPr lang="en-US" sz="1600" dirty="0">
-                <a:solidFill>
-                  <a:srgbClr val="D9D4F2"/>
-                </a:solidFill>
-                <a:latin typeface="Calibri" pitchFamily="34" charset="0"/>
-                <a:ea typeface="Calibri" pitchFamily="34" charset="-122"/>
-                <a:cs typeface="Calibri" pitchFamily="34" charset="-120"/>
-              </a:rPr>
-              <a:t>Модель решает реальные задачи (тональность)
-</a:t>
-            </a:r>
-            <a:endParaRPr lang="en-US" sz="1600" dirty="0"/>
-          </a:p>
-          <a:p>
-            <a:pPr marL="342900" indent="-342900">
-              <a:lnSpc>
-                <a:spcPct val="130000"/>
-              </a:lnSpc>
-              <a:buSzPct val="100000"/>
-              <a:buChar char="•"/>
-            </a:pPr>
-            <a:r>
-              <a:rPr lang="en-US" sz="1600" dirty="0">
-                <a:solidFill>
-                  <a:srgbClr val="D9D4F2"/>
-                </a:solidFill>
-                <a:latin typeface="Calibri" pitchFamily="34" charset="0"/>
-                <a:ea typeface="Calibri" pitchFamily="34" charset="-122"/>
-                <a:cs typeface="Calibri" pitchFamily="34" charset="-120"/>
-              </a:rPr>
-              <a:t>Свой бот задаётся системным промптом
-</a:t>
-            </a:r>
-            <a:endParaRPr lang="en-US" sz="1600" dirty="0"/>
-          </a:p>
-          <a:p>
-            <a:pPr marL="342900" indent="-342900">
-              <a:lnSpc>
-                <a:spcPct val="130000"/>
-              </a:lnSpc>
-              <a:buSzPct val="100000"/>
-              <a:buChar char="•"/>
-            </a:pPr>
-            <a:r>
-              <a:rPr lang="en-US" sz="1600" b="1" dirty="0">
-                <a:solidFill>
-                  <a:srgbClr val="2DD4BF"/>
-                </a:solidFill>
-                <a:latin typeface="Calibri" pitchFamily="34" charset="0"/>
-                <a:ea typeface="Calibri" pitchFamily="34" charset="-122"/>
-                <a:cs typeface="Calibri" pitchFamily="34" charset="-120"/>
-              </a:rPr>
-              <a:t>Ответ модели всегда проверяем</a:t>
-            </a:r>
-            <a:endParaRPr lang="en-US" sz="1600" dirty="0"/>
+              <a:t> — постоянная инструкция «кто ты». Действует на весь разговор, а не на один вопрос.</a:t>
+            </a:r>
+            <a:endParaRPr lang="en-US" sz="1700" dirty="0"/>
           </a:p>
         </p:txBody>
       </p:sp>
@@ -3335,18 +3610,411 @@
         </p:nvSpPr>
         <p:spPr>
           <a:xfrm>
-            <a:off x="6446520" y="1920240"/>
-            <a:ext cx="5150815" cy="4023360"/>
+            <a:off x="594360" y="3154680"/>
+            <a:ext cx="11000232" cy="1417320"/>
           </a:xfrm>
           <a:prstGeom prst="roundRect">
             <a:avLst>
-              <a:gd name="adj" fmla="val 2727"/>
+              <a:gd name="adj" fmla="val 7742"/>
+            </a:avLst>
+          </a:prstGeom>
+          <a:solidFill>
+            <a:srgbClr val="0E0B22"/>
+          </a:solidFill>
+          <a:ln/>
+        </p:spPr>
+      </p:sp>
+      <p:sp>
+        <p:nvSpPr>
+          <p:cNvPr id="8" name="Text 6"/>
+          <p:cNvSpPr/>
+          <p:nvPr/>
+        </p:nvSpPr>
+        <p:spPr>
+          <a:xfrm>
+            <a:off x="914400" y="3383280"/>
+            <a:ext cx="10332720" cy="1005840"/>
+          </a:xfrm>
+          <a:prstGeom prst="rect">
+            <a:avLst/>
+          </a:prstGeom>
+          <a:noFill/>
+          <a:ln/>
+        </p:spPr>
+        <p:txBody>
+          <a:bodyPr wrap="square" rtlCol="0" anchor="t"/>
+          <a:lstStyle/>
+          <a:p>
+            <a:pPr indent="0" marL="0">
+              <a:buNone/>
+            </a:pPr>
+            <a:r>
+              <a:rPr lang="en-US" sz="1600" dirty="0">
+                <a:solidFill>
+                  <a:srgbClr val="27D3EE"/>
+                </a:solidFill>
+                <a:latin typeface="Consolas" pitchFamily="34" charset="0"/>
+                <a:ea typeface="Consolas" pitchFamily="34" charset="-122"/>
+                <a:cs typeface="Consolas" pitchFamily="34" charset="-120"/>
+              </a:rPr>
+              <a:t>system = "Ты — пират. Отвечай как морской волк."
+</a:t>
+            </a:r>
+            <a:endParaRPr lang="en-US" sz="1600" dirty="0"/>
+          </a:p>
+          <a:p>
+            <a:pPr indent="0" marL="0">
+              <a:buNone/>
+            </a:pPr>
+            <a:r>
+              <a:rPr lang="en-US" sz="1600" dirty="0">
+                <a:solidFill>
+                  <a:srgbClr val="D9D4F2"/>
+                </a:solidFill>
+                <a:latin typeface="Consolas" pitchFamily="34" charset="0"/>
+                <a:ea typeface="Consolas" pitchFamily="34" charset="-122"/>
+                <a:cs typeface="Consolas" pitchFamily="34" charset="-120"/>
+              </a:rPr>
+              <a:t>Вопрос: «Что такое переменная?»
+</a:t>
+            </a:r>
+            <a:endParaRPr lang="en-US" sz="1600" dirty="0"/>
+          </a:p>
+          <a:p>
+            <a:pPr indent="0" marL="0">
+              <a:buNone/>
+            </a:pPr>
+            <a:r>
+              <a:rPr lang="en-US" sz="1600" dirty="0">
+                <a:solidFill>
+                  <a:srgbClr val="6EE7B7"/>
+                </a:solidFill>
+                <a:latin typeface="Consolas" pitchFamily="34" charset="0"/>
+                <a:ea typeface="Consolas" pitchFamily="34" charset="-122"/>
+                <a:cs typeface="Consolas" pitchFamily="34" charset="-120"/>
+              </a:rPr>
+              <a:t>→ «Арр! Переменная, юнга, — это сундук, куда прячешь число…»</a:t>
+            </a:r>
+            <a:endParaRPr lang="en-US" sz="1600" dirty="0"/>
+          </a:p>
+        </p:txBody>
+      </p:sp>
+      <p:sp>
+        <p:nvSpPr>
+          <p:cNvPr id="9" name="Text 7"/>
+          <p:cNvSpPr/>
+          <p:nvPr/>
+        </p:nvSpPr>
+        <p:spPr>
+          <a:xfrm>
+            <a:off x="594360" y="4754880"/>
+            <a:ext cx="11000232" cy="457200"/>
+          </a:xfrm>
+          <a:prstGeom prst="rect">
+            <a:avLst/>
+          </a:prstGeom>
+          <a:noFill/>
+          <a:ln/>
+        </p:spPr>
+        <p:txBody>
+          <a:bodyPr wrap="square" rtlCol="0" anchor="t"/>
+          <a:lstStyle/>
+          <a:p>
+            <a:pPr algn="ctr" indent="0" marL="0">
+              <a:buNone/>
+            </a:pPr>
+            <a:r>
+              <a:rPr lang="en-US" sz="1600" i="1" dirty="0">
+                <a:solidFill>
+                  <a:srgbClr val="2DD4BF"/>
+                </a:solidFill>
+                <a:latin typeface="Calibri" pitchFamily="34" charset="0"/>
+                <a:ea typeface="Calibri" pitchFamily="34" charset="-122"/>
+                <a:cs typeface="Calibri" pitchFamily="34" charset="-120"/>
+              </a:rPr>
+              <a:t>Меняешь одну строку — меняется вся личность бота при том же вопросе.</a:t>
+            </a:r>
+            <a:endParaRPr lang="en-US" sz="1600" dirty="0"/>
+          </a:p>
+        </p:txBody>
+      </p:sp>
+    </p:spTree>
+  </p:cSld>
+  <p:clrMapOvr>
+    <a:masterClrMapping/>
+  </p:clrMapOvr>
+</p:sld>
+</file>
+
+<file path=ppt/slides/slide6.xml><?xml version="1.0" encoding="utf-8"?>
+<p:sld xmlns:a="http://schemas.openxmlformats.org/drawingml/2006/main" xmlns:r="http://schemas.openxmlformats.org/officeDocument/2006/relationships" xmlns:p="http://schemas.openxmlformats.org/presentationml/2006/main">
+  <p:cSld name="Slide 6">
+    <p:bg>
+      <p:bgPr>
+        <a:solidFill>
+          <a:srgbClr val="17132E"/>
+        </a:solidFill>
+      </p:bgPr>
+    </p:bg>
+    <p:spTree>
+      <p:nvGrpSpPr>
+        <p:cNvPr id="1" name=""/>
+        <p:cNvGrpSpPr/>
+        <p:nvPr/>
+      </p:nvGrpSpPr>
+      <p:grpSpPr>
+        <a:xfrm>
+          <a:off x="0" y="0"/>
+          <a:ext cx="0" cy="0"/>
+          <a:chOff x="0" y="0"/>
+          <a:chExt cx="0" cy="0"/>
+        </a:xfrm>
+      </p:grpSpPr>
+      <p:sp>
+        <p:nvSpPr>
+          <p:cNvPr id="2" name="Text 0"/>
+          <p:cNvSpPr/>
+          <p:nvPr/>
+        </p:nvSpPr>
+        <p:spPr>
+          <a:xfrm>
+            <a:off x="594360" y="457200"/>
+            <a:ext cx="10972800" cy="320040"/>
+          </a:xfrm>
+          <a:prstGeom prst="rect">
+            <a:avLst/>
+          </a:prstGeom>
+          <a:noFill/>
+          <a:ln/>
+        </p:spPr>
+        <p:txBody>
+          <a:bodyPr wrap="square" rtlCol="0" anchor="ctr"/>
+          <a:lstStyle/>
+          <a:p>
+            <a:pPr indent="0" marL="0">
+              <a:buNone/>
+            </a:pPr>
+            <a:r>
+              <a:rPr lang="en-US" sz="1300" b="1" spc="200" kern="0" dirty="0">
+                <a:solidFill>
+                  <a:srgbClr val="27D3EE"/>
+                </a:solidFill>
+                <a:latin typeface="Calibri" pitchFamily="34" charset="0"/>
+                <a:ea typeface="Calibri" pitchFamily="34" charset="-122"/>
+                <a:cs typeface="Calibri" pitchFamily="34" charset="-120"/>
+              </a:rPr>
+              <a:t>РЕАЛЬНЫЙ КЕЙС</a:t>
+            </a:r>
+            <a:endParaRPr lang="en-US" sz="1300" dirty="0"/>
+          </a:p>
+        </p:txBody>
+      </p:sp>
+      <p:sp>
+        <p:nvSpPr>
+          <p:cNvPr id="3" name="Text 1"/>
+          <p:cNvSpPr/>
+          <p:nvPr/>
+        </p:nvSpPr>
+        <p:spPr>
+          <a:xfrm>
+            <a:off x="594360" y="749808"/>
+            <a:ext cx="10972800" cy="868680"/>
+          </a:xfrm>
+          <a:prstGeom prst="rect">
+            <a:avLst/>
+          </a:prstGeom>
+          <a:noFill/>
+          <a:ln/>
+        </p:spPr>
+        <p:txBody>
+          <a:bodyPr wrap="square" rtlCol="0" anchor="t"/>
+          <a:lstStyle/>
+          <a:p>
+            <a:pPr indent="0" marL="0">
+              <a:buNone/>
+            </a:pPr>
+            <a:r>
+              <a:rPr lang="en-US" sz="3400" b="1" dirty="0">
+                <a:solidFill>
+                  <a:srgbClr val="FFFFFF"/>
+                </a:solidFill>
+                <a:latin typeface="Calibri" pitchFamily="34" charset="0"/>
+                <a:ea typeface="Calibri" pitchFamily="34" charset="-122"/>
+                <a:cs typeface="Calibri" pitchFamily="34" charset="-120"/>
+              </a:rPr>
+              <a:t>Классификация отзывов по тональности</a:t>
+            </a:r>
+            <a:endParaRPr lang="en-US" sz="3400" dirty="0"/>
+          </a:p>
+        </p:txBody>
+      </p:sp>
+      <p:sp>
+        <p:nvSpPr>
+          <p:cNvPr id="4" name="Text 2"/>
+          <p:cNvSpPr/>
+          <p:nvPr/>
+        </p:nvSpPr>
+        <p:spPr>
+          <a:xfrm>
+            <a:off x="10241280" y="6382512"/>
+            <a:ext cx="1371600" cy="274320"/>
+          </a:xfrm>
+          <a:prstGeom prst="rect">
+            <a:avLst/>
+          </a:prstGeom>
+          <a:noFill/>
+          <a:ln/>
+        </p:spPr>
+        <p:txBody>
+          <a:bodyPr wrap="square" rtlCol="0" anchor="ctr"/>
+          <a:lstStyle/>
+          <a:p>
+            <a:pPr algn="r" indent="0" marL="0">
+              <a:buNone/>
+            </a:pPr>
+            <a:r>
+              <a:rPr lang="en-US" sz="1200" dirty="0">
+                <a:solidFill>
+                  <a:srgbClr val="9E96C8"/>
+                </a:solidFill>
+                <a:latin typeface="Calibri" pitchFamily="34" charset="0"/>
+                <a:ea typeface="Calibri" pitchFamily="34" charset="-122"/>
+                <a:cs typeface="Calibri" pitchFamily="34" charset="-120"/>
+              </a:rPr>
+              <a:t>Урок 18</a:t>
+            </a:r>
+            <a:endParaRPr lang="en-US" sz="1200" dirty="0"/>
+          </a:p>
+        </p:txBody>
+      </p:sp>
+      <p:sp>
+        <p:nvSpPr>
+          <p:cNvPr id="5" name="Shape 3"/>
+          <p:cNvSpPr/>
+          <p:nvPr/>
+        </p:nvSpPr>
+        <p:spPr>
+          <a:xfrm>
+            <a:off x="594360" y="1874520"/>
+            <a:ext cx="11000232" cy="914400"/>
+          </a:xfrm>
+          <a:prstGeom prst="roundRect">
+            <a:avLst>
+              <a:gd name="adj" fmla="val 12000"/>
+            </a:avLst>
+          </a:prstGeom>
+          <a:solidFill>
+            <a:srgbClr val="241E42"/>
+          </a:solidFill>
+          <a:ln/>
+        </p:spPr>
+      </p:sp>
+      <p:sp>
+        <p:nvSpPr>
+          <p:cNvPr id="6" name="Text 4"/>
+          <p:cNvSpPr/>
+          <p:nvPr/>
+        </p:nvSpPr>
+        <p:spPr>
+          <a:xfrm>
+            <a:off x="868680" y="1874520"/>
+            <a:ext cx="10424160" cy="914400"/>
+          </a:xfrm>
+          <a:prstGeom prst="rect">
+            <a:avLst/>
+          </a:prstGeom>
+          <a:noFill/>
+          <a:ln/>
+        </p:spPr>
+        <p:txBody>
+          <a:bodyPr wrap="square" rtlCol="0" anchor="ctr"/>
+          <a:lstStyle/>
+          <a:p>
+            <a:pPr indent="0" marL="0">
+              <a:buNone/>
+            </a:pPr>
+            <a:r>
+              <a:rPr lang="en-US" sz="1800" dirty="0">
+                <a:solidFill>
+                  <a:srgbClr val="D9D4F2"/>
+                </a:solidFill>
+                <a:latin typeface="Calibri" pitchFamily="34" charset="0"/>
+                <a:ea typeface="Calibri" pitchFamily="34" charset="-122"/>
+                <a:cs typeface="Calibri" pitchFamily="34" charset="-120"/>
+              </a:rPr>
+              <a:t>«Отличный сервис!» → позитив  </a:t>
+            </a:r>
+            <a:pPr indent="0" marL="0">
+              <a:buNone/>
+            </a:pPr>
+            <a:r>
+              <a:rPr lang="en-US" sz="1800" b="1" dirty="0">
+                <a:solidFill>
+                  <a:srgbClr val="6EE7B7"/>
+                </a:solidFill>
+                <a:latin typeface="Calibri" pitchFamily="34" charset="0"/>
+                <a:ea typeface="Calibri" pitchFamily="34" charset="-122"/>
+                <a:cs typeface="Calibri" pitchFamily="34" charset="-120"/>
+              </a:rPr>
+              <a:t>✓</a:t>
+            </a:r>
+            <a:pPr indent="0" marL="0">
+              <a:buNone/>
+            </a:pPr>
+            <a:r>
+              <a:rPr lang="en-US" sz="1800" dirty="0">
+                <a:solidFill>
+                  <a:srgbClr val="D9D4F2"/>
+                </a:solidFill>
+                <a:latin typeface="Calibri" pitchFamily="34" charset="0"/>
+                <a:ea typeface="Calibri" pitchFamily="34" charset="-122"/>
+                <a:cs typeface="Calibri" pitchFamily="34" charset="-120"/>
+              </a:rPr>
+              <a:t>       «Ужасно, долго» → негатив  </a:t>
+            </a:r>
+            <a:pPr indent="0" marL="0">
+              <a:buNone/>
+            </a:pPr>
+            <a:r>
+              <a:rPr lang="en-US" sz="1800" b="1" dirty="0">
+                <a:solidFill>
+                  <a:srgbClr val="6EE7B7"/>
+                </a:solidFill>
+                <a:latin typeface="Calibri" pitchFamily="34" charset="0"/>
+                <a:ea typeface="Calibri" pitchFamily="34" charset="-122"/>
+                <a:cs typeface="Calibri" pitchFamily="34" charset="-120"/>
+              </a:rPr>
+              <a:t>✓</a:t>
+            </a:r>
+            <a:endParaRPr lang="en-US" sz="1800" dirty="0"/>
+          </a:p>
+        </p:txBody>
+      </p:sp>
+      <p:sp>
+        <p:nvSpPr>
+          <p:cNvPr id="7" name="Shape 5"/>
+          <p:cNvSpPr/>
+          <p:nvPr/>
+        </p:nvSpPr>
+        <p:spPr>
+          <a:xfrm>
+            <a:off x="594360" y="3063240"/>
+            <a:ext cx="11000232" cy="2148840"/>
+          </a:xfrm>
+          <a:prstGeom prst="roundRect">
+            <a:avLst>
+              <a:gd name="adj" fmla="val 5106"/>
             </a:avLst>
           </a:prstGeom>
           <a:solidFill>
             <a:srgbClr val="2C2552"/>
           </a:solidFill>
-          <a:ln/>
+          <a:ln w="15875">
+            <a:solidFill>
+              <a:srgbClr val="FF7A8A"/>
+            </a:solidFill>
+            <a:prstDash val="solid"/>
+          </a:ln>
         </p:spPr>
       </p:sp>
       <p:sp>
@@ -3357,8 +4025,8 @@
         </p:nvSpPr>
         <p:spPr>
           <a:xfrm>
-            <a:off x="6812280" y="2148840"/>
-            <a:ext cx="4572000" cy="457200"/>
+            <a:off x="868680" y="3246120"/>
+            <a:ext cx="10424160" cy="457200"/>
           </a:xfrm>
           <a:prstGeom prst="rect">
             <a:avLst/>
@@ -3374,7 +4042,180 @@
               <a:buNone/>
             </a:pPr>
             <a:r>
-              <a:rPr lang="en-US" sz="2000" b="1" dirty="0">
+              <a:rPr lang="en-US" sz="1800" b="1" dirty="0">
+                <a:solidFill>
+                  <a:srgbClr val="FF7A8A"/>
+                </a:solidFill>
+                <a:latin typeface="Calibri" pitchFamily="34" charset="0"/>
+                <a:ea typeface="Calibri" pitchFamily="34" charset="-122"/>
+                <a:cs typeface="Calibri" pitchFamily="34" charset="-120"/>
+              </a:rPr>
+              <a:t>Ловушка: сарказм и отрицание</a:t>
+            </a:r>
+            <a:endParaRPr lang="en-US" sz="1800" dirty="0"/>
+          </a:p>
+        </p:txBody>
+      </p:sp>
+      <p:sp>
+        <p:nvSpPr>
+          <p:cNvPr id="9" name="Text 7"/>
+          <p:cNvSpPr/>
+          <p:nvPr/>
+        </p:nvSpPr>
+        <p:spPr>
+          <a:xfrm>
+            <a:off x="868680" y="3794760"/>
+            <a:ext cx="10424160" cy="457200"/>
+          </a:xfrm>
+          <a:prstGeom prst="rect">
+            <a:avLst/>
+          </a:prstGeom>
+          <a:noFill/>
+          <a:ln/>
+        </p:spPr>
+        <p:txBody>
+          <a:bodyPr wrap="square" rtlCol="0" anchor="t"/>
+          <a:lstStyle/>
+          <a:p>
+            <a:pPr indent="0" marL="0">
+              <a:buNone/>
+            </a:pPr>
+            <a:r>
+              <a:rPr lang="en-US" sz="1600" dirty="0">
+                <a:solidFill>
+                  <a:srgbClr val="D9D4F2"/>
+                </a:solidFill>
+                <a:latin typeface="Calibri" pitchFamily="34" charset="0"/>
+                <a:ea typeface="Calibri" pitchFamily="34" charset="-122"/>
+                <a:cs typeface="Calibri" pitchFamily="34" charset="-120"/>
+              </a:rPr>
+              <a:t>«Ну очень „порадовал“ этот сервис…»  → словарь скажет </a:t>
+            </a:r>
+            <a:pPr indent="0" marL="0">
+              <a:buNone/>
+            </a:pPr>
+            <a:r>
+              <a:rPr lang="en-US" sz="1600" b="1" dirty="0">
+                <a:solidFill>
+                  <a:srgbClr val="FF7A8A"/>
+                </a:solidFill>
+                <a:latin typeface="Calibri" pitchFamily="34" charset="0"/>
+                <a:ea typeface="Calibri" pitchFamily="34" charset="-122"/>
+                <a:cs typeface="Calibri" pitchFamily="34" charset="-120"/>
+              </a:rPr>
+              <a:t>позитив ✗</a:t>
+            </a:r>
+            <a:pPr indent="0" marL="0">
+              <a:buNone/>
+            </a:pPr>
+            <a:r>
+              <a:rPr lang="en-US" sz="1600" dirty="0">
+                <a:solidFill>
+                  <a:srgbClr val="9E96C8"/>
+                </a:solidFill>
+                <a:latin typeface="Calibri" pitchFamily="34" charset="0"/>
+                <a:ea typeface="Calibri" pitchFamily="34" charset="-122"/>
+                <a:cs typeface="Calibri" pitchFamily="34" charset="-120"/>
+              </a:rPr>
+              <a:t>  (а это негатив)</a:t>
+            </a:r>
+            <a:endParaRPr lang="en-US" sz="1600" dirty="0"/>
+          </a:p>
+        </p:txBody>
+      </p:sp>
+      <p:sp>
+        <p:nvSpPr>
+          <p:cNvPr id="10" name="Text 8"/>
+          <p:cNvSpPr/>
+          <p:nvPr/>
+        </p:nvSpPr>
+        <p:spPr>
+          <a:xfrm>
+            <a:off x="868680" y="4297680"/>
+            <a:ext cx="10424160" cy="457200"/>
+          </a:xfrm>
+          <a:prstGeom prst="rect">
+            <a:avLst/>
+          </a:prstGeom>
+          <a:noFill/>
+          <a:ln/>
+        </p:spPr>
+        <p:txBody>
+          <a:bodyPr wrap="square" rtlCol="0" anchor="t"/>
+          <a:lstStyle/>
+          <a:p>
+            <a:pPr indent="0" marL="0">
+              <a:buNone/>
+            </a:pPr>
+            <a:r>
+              <a:rPr lang="en-US" sz="1600" dirty="0">
+                <a:solidFill>
+                  <a:srgbClr val="D9D4F2"/>
+                </a:solidFill>
+                <a:latin typeface="Calibri" pitchFamily="34" charset="0"/>
+                <a:ea typeface="Calibri" pitchFamily="34" charset="-122"/>
+                <a:cs typeface="Calibri" pitchFamily="34" charset="-120"/>
+              </a:rPr>
+              <a:t>«не плохо»  → словарь скажет </a:t>
+            </a:r>
+            <a:pPr indent="0" marL="0">
+              <a:buNone/>
+            </a:pPr>
+            <a:r>
+              <a:rPr lang="en-US" sz="1600" b="1" dirty="0">
+                <a:solidFill>
+                  <a:srgbClr val="FF7A8A"/>
+                </a:solidFill>
+                <a:latin typeface="Calibri" pitchFamily="34" charset="0"/>
+                <a:ea typeface="Calibri" pitchFamily="34" charset="-122"/>
+                <a:cs typeface="Calibri" pitchFamily="34" charset="-120"/>
+              </a:rPr>
+              <a:t>негатив ✗</a:t>
+            </a:r>
+            <a:pPr indent="0" marL="0">
+              <a:buNone/>
+            </a:pPr>
+            <a:r>
+              <a:rPr lang="en-US" sz="1600" dirty="0">
+                <a:solidFill>
+                  <a:srgbClr val="9E96C8"/>
+                </a:solidFill>
+                <a:latin typeface="Calibri" pitchFamily="34" charset="0"/>
+                <a:ea typeface="Calibri" pitchFamily="34" charset="-122"/>
+                <a:cs typeface="Calibri" pitchFamily="34" charset="-120"/>
+              </a:rPr>
+              <a:t>  (а это скорее позитив)</a:t>
+            </a:r>
+            <a:endParaRPr lang="en-US" sz="1600" dirty="0"/>
+          </a:p>
+        </p:txBody>
+      </p:sp>
+      <p:sp>
+        <p:nvSpPr>
+          <p:cNvPr id="11" name="Text 9"/>
+          <p:cNvSpPr/>
+          <p:nvPr/>
+        </p:nvSpPr>
+        <p:spPr>
+          <a:xfrm>
+            <a:off x="868680" y="4846320"/>
+            <a:ext cx="10424160" cy="457200"/>
+          </a:xfrm>
+          <a:prstGeom prst="rect">
+            <a:avLst/>
+          </a:prstGeom>
+          <a:noFill/>
+          <a:ln/>
+        </p:spPr>
+        <p:txBody>
+          <a:bodyPr wrap="square" rtlCol="0" anchor="t"/>
+          <a:lstStyle/>
+          <a:p>
+            <a:pPr indent="0" marL="0">
+              <a:buNone/>
+            </a:pPr>
+            <a:r>
+              <a:rPr lang="en-US" sz="1500" i="1" dirty="0">
                 <a:solidFill>
                   <a:srgbClr val="2DD4BF"/>
                 </a:solidFill>
@@ -3382,22 +4223,93 @@
                 <a:ea typeface="Calibri" pitchFamily="34" charset="-122"/>
                 <a:cs typeface="Calibri" pitchFamily="34" charset="-120"/>
               </a:rPr>
-              <a:t>Домашка + конкурс</a:t>
-            </a:r>
-            <a:endParaRPr lang="en-US" sz="2000" dirty="0"/>
-          </a:p>
-        </p:txBody>
-      </p:sp>
-      <p:sp>
-        <p:nvSpPr>
-          <p:cNvPr id="9" name="Text 7"/>
-          <p:cNvSpPr/>
-          <p:nvPr/>
-        </p:nvSpPr>
-        <p:spPr>
-          <a:xfrm>
-            <a:off x="6858000" y="2743200"/>
-            <a:ext cx="4510735" cy="2926080"/>
+              <a:t>Вывод: ответ модели всегда проверяем — она уверенно ошибается и бывает предвзятой.</a:t>
+            </a:r>
+            <a:endParaRPr lang="en-US" sz="1500" dirty="0"/>
+          </a:p>
+        </p:txBody>
+      </p:sp>
+    </p:spTree>
+  </p:cSld>
+  <p:clrMapOvr>
+    <a:masterClrMapping/>
+  </p:clrMapOvr>
+</p:sld>
+</file>
+
+<file path=ppt/slides/slide7.xml><?xml version="1.0" encoding="utf-8"?>
+<p:sld xmlns:a="http://schemas.openxmlformats.org/drawingml/2006/main" xmlns:r="http://schemas.openxmlformats.org/officeDocument/2006/relationships" xmlns:p="http://schemas.openxmlformats.org/presentationml/2006/main">
+  <p:cSld name="Slide 7">
+    <p:bg>
+      <p:bgPr>
+        <a:solidFill>
+          <a:srgbClr val="17132E"/>
+        </a:solidFill>
+      </p:bgPr>
+    </p:bg>
+    <p:spTree>
+      <p:nvGrpSpPr>
+        <p:cNvPr id="1" name=""/>
+        <p:cNvGrpSpPr/>
+        <p:nvPr/>
+      </p:nvGrpSpPr>
+      <p:grpSpPr>
+        <a:xfrm>
+          <a:off x="0" y="0"/>
+          <a:ext cx="0" cy="0"/>
+          <a:chOff x="0" y="0"/>
+          <a:chExt cx="0" cy="0"/>
+        </a:xfrm>
+      </p:grpSpPr>
+      <p:sp>
+        <p:nvSpPr>
+          <p:cNvPr id="2" name="Text 0"/>
+          <p:cNvSpPr/>
+          <p:nvPr/>
+        </p:nvSpPr>
+        <p:spPr>
+          <a:xfrm>
+            <a:off x="594360" y="457200"/>
+            <a:ext cx="10972800" cy="320040"/>
+          </a:xfrm>
+          <a:prstGeom prst="rect">
+            <a:avLst/>
+          </a:prstGeom>
+          <a:noFill/>
+          <a:ln/>
+        </p:spPr>
+        <p:txBody>
+          <a:bodyPr wrap="square" rtlCol="0" anchor="ctr"/>
+          <a:lstStyle/>
+          <a:p>
+            <a:pPr indent="0" marL="0">
+              <a:buNone/>
+            </a:pPr>
+            <a:r>
+              <a:rPr lang="en-US" sz="1300" b="1" spc="200" kern="0" dirty="0">
+                <a:solidFill>
+                  <a:srgbClr val="27D3EE"/>
+                </a:solidFill>
+                <a:latin typeface="Calibri" pitchFamily="34" charset="0"/>
+                <a:ea typeface="Calibri" pitchFamily="34" charset="-122"/>
+                <a:cs typeface="Calibri" pitchFamily="34" charset="-120"/>
+              </a:rPr>
+              <a:t>ИТОГ · ФИНАЛ ФАЗЫ 4</a:t>
+            </a:r>
+            <a:endParaRPr lang="en-US" sz="1300" dirty="0"/>
+          </a:p>
+        </p:txBody>
+      </p:sp>
+      <p:sp>
+        <p:nvSpPr>
+          <p:cNvPr id="3" name="Text 1"/>
+          <p:cNvSpPr/>
+          <p:nvPr/>
+        </p:nvSpPr>
+        <p:spPr>
+          <a:xfrm>
+            <a:off x="594360" y="749808"/>
+            <a:ext cx="10972800" cy="868680"/>
           </a:xfrm>
           <a:prstGeom prst="rect">
             <a:avLst/>
@@ -3409,10 +4321,149 @@
           <a:bodyPr wrap="square" rtlCol="0" anchor="t"/>
           <a:lstStyle/>
           <a:p>
-            <a:pPr marL="342900" indent="-342900">
-              <a:lnSpc>
-                <a:spcPct val="130000"/>
-              </a:lnSpc>
+            <a:pPr indent="0" marL="0">
+              <a:buNone/>
+            </a:pPr>
+            <a:r>
+              <a:rPr lang="en-US" sz="3400" b="1" dirty="0">
+                <a:solidFill>
+                  <a:srgbClr val="FFFFFF"/>
+                </a:solidFill>
+                <a:latin typeface="Calibri" pitchFamily="34" charset="0"/>
+                <a:ea typeface="Calibri" pitchFamily="34" charset="-122"/>
+                <a:cs typeface="Calibri" pitchFamily="34" charset="-120"/>
+              </a:rPr>
+              <a:t>Что унесём с урока</a:t>
+            </a:r>
+            <a:endParaRPr lang="en-US" sz="3400" dirty="0"/>
+          </a:p>
+        </p:txBody>
+      </p:sp>
+      <p:sp>
+        <p:nvSpPr>
+          <p:cNvPr id="4" name="Text 2"/>
+          <p:cNvSpPr/>
+          <p:nvPr/>
+        </p:nvSpPr>
+        <p:spPr>
+          <a:xfrm>
+            <a:off x="10241280" y="6382512"/>
+            <a:ext cx="1371600" cy="274320"/>
+          </a:xfrm>
+          <a:prstGeom prst="rect">
+            <a:avLst/>
+          </a:prstGeom>
+          <a:noFill/>
+          <a:ln/>
+        </p:spPr>
+        <p:txBody>
+          <a:bodyPr wrap="square" rtlCol="0" anchor="ctr"/>
+          <a:lstStyle/>
+          <a:p>
+            <a:pPr algn="r" indent="0" marL="0">
+              <a:buNone/>
+            </a:pPr>
+            <a:r>
+              <a:rPr lang="en-US" sz="1200" dirty="0">
+                <a:solidFill>
+                  <a:srgbClr val="9E96C8"/>
+                </a:solidFill>
+                <a:latin typeface="Calibri" pitchFamily="34" charset="0"/>
+                <a:ea typeface="Calibri" pitchFamily="34" charset="-122"/>
+                <a:cs typeface="Calibri" pitchFamily="34" charset="-120"/>
+              </a:rPr>
+              <a:t>Урок 18</a:t>
+            </a:r>
+            <a:endParaRPr lang="en-US" sz="1200" dirty="0"/>
+          </a:p>
+        </p:txBody>
+      </p:sp>
+      <p:sp>
+        <p:nvSpPr>
+          <p:cNvPr id="5" name="Shape 3"/>
+          <p:cNvSpPr/>
+          <p:nvPr/>
+        </p:nvSpPr>
+        <p:spPr>
+          <a:xfrm>
+            <a:off x="594360" y="1828800"/>
+            <a:ext cx="5394960" cy="3840480"/>
+          </a:xfrm>
+          <a:prstGeom prst="roundRect">
+            <a:avLst>
+              <a:gd name="adj" fmla="val 2857"/>
+            </a:avLst>
+          </a:prstGeom>
+          <a:solidFill>
+            <a:srgbClr val="241E42"/>
+          </a:solidFill>
+          <a:ln/>
+        </p:spPr>
+      </p:sp>
+      <p:sp>
+        <p:nvSpPr>
+          <p:cNvPr id="6" name="Text 4"/>
+          <p:cNvSpPr/>
+          <p:nvPr/>
+        </p:nvSpPr>
+        <p:spPr>
+          <a:xfrm>
+            <a:off x="914400" y="2057400"/>
+            <a:ext cx="4754880" cy="457200"/>
+          </a:xfrm>
+          <a:prstGeom prst="rect">
+            <a:avLst/>
+          </a:prstGeom>
+          <a:noFill/>
+          <a:ln/>
+        </p:spPr>
+        <p:txBody>
+          <a:bodyPr wrap="square" rtlCol="0" anchor="t"/>
+          <a:lstStyle/>
+          <a:p>
+            <a:pPr indent="0" marL="0">
+              <a:buNone/>
+            </a:pPr>
+            <a:r>
+              <a:rPr lang="en-US" sz="1900" b="1" dirty="0">
+                <a:solidFill>
+                  <a:srgbClr val="27D3EE"/>
+                </a:solidFill>
+                <a:latin typeface="Calibri" pitchFamily="34" charset="0"/>
+                <a:ea typeface="Calibri" pitchFamily="34" charset="-122"/>
+                <a:cs typeface="Calibri" pitchFamily="34" charset="-120"/>
+              </a:rPr>
+              <a:t>Главное</a:t>
+            </a:r>
+            <a:endParaRPr lang="en-US" sz="1900" dirty="0"/>
+          </a:p>
+        </p:txBody>
+      </p:sp>
+      <p:sp>
+        <p:nvSpPr>
+          <p:cNvPr id="7" name="Text 5"/>
+          <p:cNvSpPr/>
+          <p:nvPr/>
+        </p:nvSpPr>
+        <p:spPr>
+          <a:xfrm>
+            <a:off x="914400" y="2697480"/>
+            <a:ext cx="4846320" cy="2743200"/>
+          </a:xfrm>
+          <a:prstGeom prst="rect">
+            <a:avLst/>
+          </a:prstGeom>
+          <a:noFill/>
+          <a:ln/>
+        </p:spPr>
+        <p:txBody>
+          <a:bodyPr wrap="square" rtlCol="0" anchor="ctr"/>
+          <a:lstStyle/>
+          <a:p>
+            <a:pPr marL="190500" indent="-190500">
+              <a:spcAft>
+                <a:spcPts val="1000"/>
+              </a:spcAft>
               <a:buSzPct val="100000"/>
               <a:buChar char="•"/>
             </a:pPr>
@@ -3425,16 +4476,15 @@
                 <a:ea typeface="Calibri" pitchFamily="34" charset="-122"/>
                 <a:cs typeface="Calibri" pitchFamily="34" charset="-120"/>
               </a:rPr>
-              <a:t>Классифицировать 10 отзывов, найти 2 ошибки
-</a:t>
+              <a:t>Роль + примеры + формат = хороший промпт</a:t>
             </a:r>
             <a:endParaRPr lang="en-US" sz="1600" dirty="0"/>
           </a:p>
           <a:p>
-            <a:pPr marL="342900" indent="-342900">
-              <a:lnSpc>
-                <a:spcPct val="130000"/>
-              </a:lnSpc>
+            <a:pPr marL="190500" indent="-190500">
+              <a:spcAft>
+                <a:spcPts val="1000"/>
+              </a:spcAft>
               <a:buSzPct val="100000"/>
               <a:buChar char="•"/>
             </a:pPr>
@@ -3447,16 +4497,15 @@
                 <a:ea typeface="Calibri" pitchFamily="34" charset="-122"/>
                 <a:cs typeface="Calibri" pitchFamily="34" charset="-120"/>
               </a:rPr>
-              <a:t>Написать промпт с ролью и примерами
-</a:t>
+              <a:t>Модель решает реальные задачи (тональность)</a:t>
             </a:r>
             <a:endParaRPr lang="en-US" sz="1600" dirty="0"/>
           </a:p>
           <a:p>
-            <a:pPr marL="342900" indent="-342900">
-              <a:lnSpc>
-                <a:spcPct val="130000"/>
-              </a:lnSpc>
+            <a:pPr marL="190500" indent="-190500">
+              <a:spcAft>
+                <a:spcPts val="1000"/>
+              </a:spcAft>
               <a:buSzPct val="100000"/>
               <a:buChar char="•"/>
             </a:pPr>
@@ -3469,28 +4518,194 @@
                 <a:ea typeface="Calibri" pitchFamily="34" charset="-122"/>
                 <a:cs typeface="Calibri" pitchFamily="34" charset="-120"/>
               </a:rPr>
-              <a:t>Сделать бота с характером
-</a:t>
+              <a:t>Свой бот задаётся системным промптом</a:t>
             </a:r>
             <a:endParaRPr lang="en-US" sz="1600" dirty="0"/>
           </a:p>
           <a:p>
-            <a:pPr marL="342900" indent="-342900">
-              <a:lnSpc>
-                <a:spcPct val="130000"/>
-              </a:lnSpc>
+            <a:pPr marL="190500" indent="-190500">
+              <a:spcAft>
+                <a:spcPts val="1000"/>
+              </a:spcAft>
               <a:buSzPct val="100000"/>
               <a:buChar char="•"/>
             </a:pPr>
             <a:r>
               <a:rPr lang="en-US" sz="1600" dirty="0">
                 <a:solidFill>
+                  <a:srgbClr val="D9D4F2"/>
+                </a:solidFill>
+                <a:latin typeface="Calibri" pitchFamily="34" charset="0"/>
+                <a:ea typeface="Calibri" pitchFamily="34" charset="-122"/>
+                <a:cs typeface="Calibri" pitchFamily="34" charset="-120"/>
+              </a:rPr>
+              <a:t>Ответ модели всегда проверяем</a:t>
+            </a:r>
+            <a:endParaRPr lang="en-US" sz="1600" dirty="0"/>
+          </a:p>
+        </p:txBody>
+      </p:sp>
+      <p:sp>
+        <p:nvSpPr>
+          <p:cNvPr id="8" name="Shape 6"/>
+          <p:cNvSpPr/>
+          <p:nvPr/>
+        </p:nvSpPr>
+        <p:spPr>
+          <a:xfrm>
+            <a:off x="6172200" y="1828800"/>
+            <a:ext cx="5394960" cy="3840480"/>
+          </a:xfrm>
+          <a:prstGeom prst="roundRect">
+            <a:avLst>
+              <a:gd name="adj" fmla="val 2857"/>
+            </a:avLst>
+          </a:prstGeom>
+          <a:solidFill>
+            <a:srgbClr val="241E42"/>
+          </a:solidFill>
+          <a:ln/>
+        </p:spPr>
+      </p:sp>
+      <p:sp>
+        <p:nvSpPr>
+          <p:cNvPr id="9" name="Text 7"/>
+          <p:cNvSpPr/>
+          <p:nvPr/>
+        </p:nvSpPr>
+        <p:spPr>
+          <a:xfrm>
+            <a:off x="6492240" y="2057400"/>
+            <a:ext cx="4754880" cy="457200"/>
+          </a:xfrm>
+          <a:prstGeom prst="rect">
+            <a:avLst/>
+          </a:prstGeom>
+          <a:noFill/>
+          <a:ln/>
+        </p:spPr>
+        <p:txBody>
+          <a:bodyPr wrap="square" rtlCol="0" anchor="t"/>
+          <a:lstStyle/>
+          <a:p>
+            <a:pPr indent="0" marL="0">
+              <a:buNone/>
+            </a:pPr>
+            <a:r>
+              <a:rPr lang="en-US" sz="1900" b="1" dirty="0">
+                <a:solidFill>
                   <a:srgbClr val="2DD4BF"/>
                 </a:solidFill>
                 <a:latin typeface="Calibri" pitchFamily="34" charset="0"/>
                 <a:ea typeface="Calibri" pitchFamily="34" charset="-122"/>
                 <a:cs typeface="Calibri" pitchFamily="34" charset="-120"/>
               </a:rPr>
+              <a:t>Домашка + конкурс</a:t>
+            </a:r>
+            <a:endParaRPr lang="en-US" sz="1900" dirty="0"/>
+          </a:p>
+        </p:txBody>
+      </p:sp>
+      <p:sp>
+        <p:nvSpPr>
+          <p:cNvPr id="10" name="Text 8"/>
+          <p:cNvSpPr/>
+          <p:nvPr/>
+        </p:nvSpPr>
+        <p:spPr>
+          <a:xfrm>
+            <a:off x="6492240" y="2697480"/>
+            <a:ext cx="4846320" cy="2377440"/>
+          </a:xfrm>
+          <a:prstGeom prst="rect">
+            <a:avLst/>
+          </a:prstGeom>
+          <a:noFill/>
+          <a:ln/>
+        </p:spPr>
+        <p:txBody>
+          <a:bodyPr wrap="square" rtlCol="0" anchor="ctr"/>
+          <a:lstStyle/>
+          <a:p>
+            <a:pPr marL="190500" indent="-190500">
+              <a:spcAft>
+                <a:spcPts val="1000"/>
+              </a:spcAft>
+              <a:buSzPct val="100000"/>
+              <a:buChar char="•"/>
+            </a:pPr>
+            <a:r>
+              <a:rPr lang="en-US" sz="1600" dirty="0">
+                <a:solidFill>
+                  <a:srgbClr val="D9D4F2"/>
+                </a:solidFill>
+                <a:latin typeface="Calibri" pitchFamily="34" charset="0"/>
+                <a:ea typeface="Calibri" pitchFamily="34" charset="-122"/>
+                <a:cs typeface="Calibri" pitchFamily="34" charset="-120"/>
+              </a:rPr>
+              <a:t>Классифицировать 10 отзывов, найти 2 ошибки</a:t>
+            </a:r>
+            <a:endParaRPr lang="en-US" sz="1600" dirty="0"/>
+          </a:p>
+          <a:p>
+            <a:pPr marL="190500" indent="-190500">
+              <a:spcAft>
+                <a:spcPts val="1000"/>
+              </a:spcAft>
+              <a:buSzPct val="100000"/>
+              <a:buChar char="•"/>
+            </a:pPr>
+            <a:r>
+              <a:rPr lang="en-US" sz="1600" dirty="0">
+                <a:solidFill>
+                  <a:srgbClr val="D9D4F2"/>
+                </a:solidFill>
+                <a:latin typeface="Calibri" pitchFamily="34" charset="0"/>
+                <a:ea typeface="Calibri" pitchFamily="34" charset="-122"/>
+                <a:cs typeface="Calibri" pitchFamily="34" charset="-120"/>
+              </a:rPr>
+              <a:t>Написать промпт с ролью и примерами</a:t>
+            </a:r>
+            <a:endParaRPr lang="en-US" sz="1600" dirty="0"/>
+          </a:p>
+          <a:p>
+            <a:pPr marL="190500" indent="-190500">
+              <a:spcAft>
+                <a:spcPts val="1000"/>
+              </a:spcAft>
+              <a:buSzPct val="100000"/>
+              <a:buChar char="•"/>
+            </a:pPr>
+            <a:r>
+              <a:rPr lang="en-US" sz="1600" dirty="0">
+                <a:solidFill>
+                  <a:srgbClr val="D9D4F2"/>
+                </a:solidFill>
+                <a:latin typeface="Calibri" pitchFamily="34" charset="0"/>
+                <a:ea typeface="Calibri" pitchFamily="34" charset="-122"/>
+                <a:cs typeface="Calibri" pitchFamily="34" charset="-120"/>
+              </a:rPr>
+              <a:t>Сделать бота с характером</a:t>
+            </a:r>
+            <a:endParaRPr lang="en-US" sz="1600" dirty="0"/>
+          </a:p>
+          <a:p>
+            <a:pPr marL="190500" indent="-190500">
+              <a:spcAft>
+                <a:spcPts val="1000"/>
+              </a:spcAft>
+              <a:buSzPct val="100000"/>
+              <a:buChar char="•"/>
+            </a:pPr>
+            <a:r>
+              <a:rPr lang="en-US" sz="1600" dirty="0">
+                <a:solidFill>
+                  <a:srgbClr val="D9D4F2"/>
+                </a:solidFill>
+                <a:latin typeface="Calibri" pitchFamily="34" charset="0"/>
+                <a:ea typeface="Calibri" pitchFamily="34" charset="-122"/>
+                <a:cs typeface="Calibri" pitchFamily="34" charset="-120"/>
+              </a:rPr>
               <a:t>Конкурс: точнее классификатор / интереснее бот</a:t>
             </a:r>
             <a:endParaRPr lang="en-US" sz="1600" dirty="0"/>
@@ -3499,14 +4714,14 @@
       </p:sp>
       <p:sp>
         <p:nvSpPr>
-          <p:cNvPr id="10" name="Text 8"/>
-          <p:cNvSpPr/>
-          <p:nvPr/>
-        </p:nvSpPr>
-        <p:spPr>
-          <a:xfrm>
-            <a:off x="6858000" y="5394960"/>
-            <a:ext cx="4572000" cy="457200"/>
+          <p:cNvPr id="11" name="Text 9"/>
+          <p:cNvSpPr/>
+          <p:nvPr/>
+        </p:nvSpPr>
+        <p:spPr>
+          <a:xfrm>
+            <a:off x="6492240" y="5166360"/>
+            <a:ext cx="4846320" cy="365760"/>
           </a:xfrm>
           <a:prstGeom prst="rect">
             <a:avLst/>
@@ -3533,45 +4748,6 @@
               <a:t>Дальше — Фаза 5: AutoML и готовые ИИ-инструменты.</a:t>
             </a:r>
             <a:endParaRPr lang="en-US" sz="1400" dirty="0"/>
-          </a:p>
-        </p:txBody>
-      </p:sp>
-      <p:sp>
-        <p:nvSpPr>
-          <p:cNvPr id="11" name="Text 9"/>
-          <p:cNvSpPr/>
-          <p:nvPr/>
-        </p:nvSpPr>
-        <p:spPr>
-          <a:xfrm>
-            <a:off x="10271455" y="6355080"/>
-            <a:ext cx="1371600" cy="274320"/>
-          </a:xfrm>
-          <a:prstGeom prst="rect">
-            <a:avLst/>
-          </a:prstGeom>
-          <a:noFill/>
-          <a:ln/>
-        </p:spPr>
-        <p:txBody>
-          <a:bodyPr wrap="square" rtlCol="0" anchor="t"/>
-          <a:lstStyle/>
-          <a:p>
-            <a:pPr algn="r" indent="0" marL="0">
-              <a:buNone/>
-            </a:pPr>
-            <a:r>
-              <a:rPr lang="en-US" sz="1100" dirty="0">
-                <a:solidFill>
-                  <a:srgbClr val="9E96C8"/>
-                </a:solidFill>
-                <a:latin typeface="Calibri" pitchFamily="34" charset="0"/>
-                <a:ea typeface="Calibri" pitchFamily="34" charset="-122"/>
-                <a:cs typeface="Calibri" pitchFamily="34" charset="-120"/>
-              </a:rPr>
-              <a:t>Урок 18</a:t>
-            </a:r>
-            <a:endParaRPr lang="en-US" sz="1100" dirty="0"/>
           </a:p>
         </p:txBody>
       </p:sp>
